--- a/Mengolah yang Baru/Presentation1.pptx
+++ b/Mengolah yang Baru/Presentation1.pptx
@@ -9,8 +9,8 @@
     <p:notesMasterId r:id="rId5"/>
   </p:notesMasterIdLst>
   <p:sldIdLst>
-    <p:sldId id="256" r:id="rId4"/>
-    <p:sldId id="259" r:id="rId6"/>
+    <p:sldId id="259" r:id="rId4"/>
+    <p:sldId id="256" r:id="rId6"/>
   </p:sldIdLst>
   <p:sldSz cx="12192000" cy="6858000"/>
   <p:notesSz cx="6858000" cy="9144000"/>
@@ -6466,6 +6466,1245 @@
           <a:chExt cx="0" cy="0"/>
         </a:xfrm>
       </p:grpSpPr>
+      <p:sp>
+        <p:nvSpPr>
+          <p:cNvPr id="2" name="Text Box 1"/>
+          <p:cNvSpPr txBox="1"/>
+          <p:nvPr/>
+        </p:nvSpPr>
+        <p:spPr>
+          <a:xfrm>
+            <a:off x="1979930" y="2406650"/>
+            <a:ext cx="8731250" cy="1861185"/>
+          </a:xfrm>
+          <a:prstGeom prst="rect">
+            <a:avLst/>
+          </a:prstGeom>
+          <a:noFill/>
+        </p:spPr>
+        <p:txBody>
+          <a:bodyPr wrap="square" rtlCol="0">
+            <a:spAutoFit/>
+          </a:bodyPr>
+          <a:p>
+            <a:pPr algn="ctr"/>
+            <a:r>
+              <a:rPr lang="en-US" sz="11500" b="1"/>
+              <a:t>WELCOME</a:t>
+            </a:r>
+            <a:endParaRPr lang="en-US" sz="11500" b="1"/>
+          </a:p>
+        </p:txBody>
+      </p:sp>
+      <p:grpSp>
+        <p:nvGrpSpPr>
+          <p:cNvPr id="52" name="D"/>
+          <p:cNvGrpSpPr/>
+          <p:nvPr/>
+        </p:nvGrpSpPr>
+        <p:grpSpPr>
+          <a:xfrm>
+            <a:off x="-2126615" y="0"/>
+            <a:ext cx="3746500" cy="6921500"/>
+            <a:chOff x="14400" y="0"/>
+            <a:chExt cx="5900" cy="10900"/>
+          </a:xfrm>
+        </p:grpSpPr>
+        <p:sp>
+          <p:nvSpPr>
+            <p:cNvPr id="22" name="Rectangle 21"/>
+            <p:cNvSpPr/>
+            <p:nvPr/>
+          </p:nvSpPr>
+          <p:spPr>
+            <a:xfrm>
+              <a:off x="14400" y="0"/>
+              <a:ext cx="4820" cy="10900"/>
+            </a:xfrm>
+            <a:prstGeom prst="rect">
+              <a:avLst/>
+            </a:prstGeom>
+            <a:ln>
+              <a:noFill/>
+            </a:ln>
+          </p:spPr>
+          <p:style>
+            <a:lnRef idx="2">
+              <a:schemeClr val="accent1">
+                <a:lumMod val="75000"/>
+              </a:schemeClr>
+            </a:lnRef>
+            <a:fillRef idx="1">
+              <a:schemeClr val="accent1"/>
+            </a:fillRef>
+            <a:effectRef idx="0">
+              <a:srgbClr val="FFFFFF"/>
+            </a:effectRef>
+            <a:fontRef idx="minor">
+              <a:schemeClr val="lt1"/>
+            </a:fontRef>
+          </p:style>
+          <p:txBody>
+            <a:bodyPr rtlCol="0" anchor="ctr"/>
+            <a:p>
+              <a:pPr algn="ctr"/>
+              <a:endParaRPr lang="en-US"/>
+            </a:p>
+          </p:txBody>
+        </p:sp>
+        <p:sp>
+          <p:nvSpPr>
+            <p:cNvPr id="26" name="Isosceles Triangle 25"/>
+            <p:cNvSpPr/>
+            <p:nvPr/>
+          </p:nvSpPr>
+          <p:spPr>
+            <a:xfrm rot="5400000">
+              <a:off x="18400" y="1890"/>
+              <a:ext cx="2720" cy="1080"/>
+            </a:xfrm>
+            <a:prstGeom prst="triangle">
+              <a:avLst/>
+            </a:prstGeom>
+            <a:solidFill>
+              <a:srgbClr val="4874CB"/>
+            </a:solidFill>
+            <a:ln>
+              <a:noFill/>
+            </a:ln>
+          </p:spPr>
+          <p:style>
+            <a:lnRef idx="2">
+              <a:schemeClr val="accent1">
+                <a:lumMod val="75000"/>
+              </a:schemeClr>
+            </a:lnRef>
+            <a:fillRef idx="1">
+              <a:schemeClr val="accent1"/>
+            </a:fillRef>
+            <a:effectRef idx="0">
+              <a:srgbClr val="FFFFFF"/>
+            </a:effectRef>
+            <a:fontRef idx="minor">
+              <a:schemeClr val="lt1"/>
+            </a:fontRef>
+          </p:style>
+          <p:txBody>
+            <a:bodyPr rtlCol="0" anchor="ctr"/>
+            <a:p>
+              <a:pPr algn="ctr"/>
+              <a:endParaRPr lang="en-US"/>
+            </a:p>
+          </p:txBody>
+        </p:sp>
+        <p:sp>
+          <p:nvSpPr>
+            <p:cNvPr id="30" name="Text Box 29"/>
+            <p:cNvSpPr txBox="1"/>
+            <p:nvPr/>
+          </p:nvSpPr>
+          <p:spPr>
+            <a:xfrm>
+              <a:off x="15928" y="1310"/>
+              <a:ext cx="1819" cy="2080"/>
+            </a:xfrm>
+            <a:prstGeom prst="rect">
+              <a:avLst/>
+            </a:prstGeom>
+            <a:noFill/>
+          </p:spPr>
+          <p:txBody>
+            <a:bodyPr wrap="square" rtlCol="0">
+              <a:noAutofit/>
+            </a:bodyPr>
+            <a:p>
+              <a:pPr algn="ctr"/>
+              <a:r>
+                <a:rPr lang="en-US" sz="6600">
+                  <a:solidFill>
+                    <a:schemeClr val="bg1"/>
+                  </a:solidFill>
+                  <a:latin typeface="Comic Sans MS" panose="030F0702030302020204" charset="0"/>
+                  <a:cs typeface="Comic Sans MS" panose="030F0702030302020204" charset="0"/>
+                </a:rPr>
+                <a:t>D</a:t>
+              </a:r>
+              <a:endParaRPr lang="en-US" sz="6600">
+                <a:solidFill>
+                  <a:schemeClr val="bg1"/>
+                </a:solidFill>
+                <a:latin typeface="Comic Sans MS" panose="030F0702030302020204" charset="0"/>
+                <a:cs typeface="Comic Sans MS" panose="030F0702030302020204" charset="0"/>
+              </a:endParaRPr>
+            </a:p>
+          </p:txBody>
+        </p:sp>
+        <p:grpSp>
+          <p:nvGrpSpPr>
+            <p:cNvPr id="43" name="Group 42"/>
+            <p:cNvGrpSpPr/>
+            <p:nvPr/>
+          </p:nvGrpSpPr>
+          <p:grpSpPr>
+            <a:xfrm>
+              <a:off x="15181" y="3390"/>
+              <a:ext cx="3258" cy="3100"/>
+              <a:chOff x="752" y="3390"/>
+              <a:chExt cx="3258" cy="3100"/>
+            </a:xfrm>
+          </p:grpSpPr>
+          <p:sp>
+            <p:nvSpPr>
+              <p:cNvPr id="44" name="Text Box 43"/>
+              <p:cNvSpPr txBox="1"/>
+              <p:nvPr/>
+            </p:nvSpPr>
+            <p:spPr>
+              <a:xfrm>
+                <a:off x="752" y="3390"/>
+                <a:ext cx="3258" cy="2080"/>
+              </a:xfrm>
+              <a:prstGeom prst="rect">
+                <a:avLst/>
+              </a:prstGeom>
+              <a:noFill/>
+            </p:spPr>
+            <p:txBody>
+              <a:bodyPr wrap="square" rtlCol="0">
+                <a:noAutofit/>
+              </a:bodyPr>
+              <a:p>
+                <a:pPr algn="ctr"/>
+                <a:r>
+                  <a:rPr lang="en-US" sz="2000">
+                    <a:solidFill>
+                      <a:schemeClr val="bg1"/>
+                    </a:solidFill>
+                    <a:latin typeface="Comic Sans MS" panose="030F0702030302020204" charset="0"/>
+                    <a:cs typeface="Comic Sans MS" panose="030F0702030302020204" charset="0"/>
+                  </a:rPr>
+                  <a:t>Perkenalan</a:t>
+                </a:r>
+                <a:endParaRPr lang="en-US" sz="2000">
+                  <a:solidFill>
+                    <a:schemeClr val="bg1"/>
+                  </a:solidFill>
+                  <a:latin typeface="Comic Sans MS" panose="030F0702030302020204" charset="0"/>
+                  <a:cs typeface="Comic Sans MS" panose="030F0702030302020204" charset="0"/>
+                </a:endParaRPr>
+              </a:p>
+            </p:txBody>
+          </p:sp>
+          <p:sp>
+            <p:nvSpPr>
+              <p:cNvPr id="45" name="Text Box 44"/>
+              <p:cNvSpPr txBox="1"/>
+              <p:nvPr/>
+            </p:nvSpPr>
+            <p:spPr>
+              <a:xfrm>
+                <a:off x="752" y="4410"/>
+                <a:ext cx="3258" cy="2080"/>
+              </a:xfrm>
+              <a:prstGeom prst="rect">
+                <a:avLst/>
+              </a:prstGeom>
+              <a:noFill/>
+            </p:spPr>
+            <p:txBody>
+              <a:bodyPr wrap="square" rtlCol="0">
+                <a:noAutofit/>
+              </a:bodyPr>
+              <a:p>
+                <a:pPr algn="ctr"/>
+                <a:r>
+                  <a:rPr lang="en-US" altLang="en-US" sz="900">
+                    <a:solidFill>
+                      <a:schemeClr val="bg1"/>
+                    </a:solidFill>
+                    <a:latin typeface="Comic Sans MS" panose="030F0702030302020204" charset="0"/>
+                    <a:cs typeface="Comic Sans MS" panose="030F0702030302020204" charset="0"/>
+                  </a:rPr>
+                  <a:t>Lorem ipsum dolor sit amet, tempor fugiat velit exercitation qui. Velit non adipiscing fugiat reprehenderit cupidatat duis sed officia excepteur quis ut ullamco. Cillum irure proident aliqua sint anim fugiat in in adipiscing minim in aute.</a:t>
+                </a:r>
+                <a:endParaRPr lang="en-US" altLang="en-US" sz="900">
+                  <a:solidFill>
+                    <a:schemeClr val="bg1"/>
+                  </a:solidFill>
+                  <a:latin typeface="Comic Sans MS" panose="030F0702030302020204" charset="0"/>
+                  <a:cs typeface="Comic Sans MS" panose="030F0702030302020204" charset="0"/>
+                </a:endParaRPr>
+              </a:p>
+              <a:p>
+                <a:pPr algn="ctr"/>
+                <a:endParaRPr lang="en-US" altLang="en-US" sz="900">
+                  <a:solidFill>
+                    <a:schemeClr val="bg1"/>
+                  </a:solidFill>
+                  <a:latin typeface="Comic Sans MS" panose="030F0702030302020204" charset="0"/>
+                  <a:cs typeface="Comic Sans MS" panose="030F0702030302020204" charset="0"/>
+                </a:endParaRPr>
+              </a:p>
+              <a:p>
+                <a:pPr algn="ctr"/>
+                <a:r>
+                  <a:rPr lang="en-US" altLang="en-US" sz="900">
+                    <a:solidFill>
+                      <a:schemeClr val="bg1"/>
+                    </a:solidFill>
+                    <a:latin typeface="Comic Sans MS" panose="030F0702030302020204" charset="0"/>
+                    <a:cs typeface="Comic Sans MS" panose="030F0702030302020204" charset="0"/>
+                  </a:rPr>
+                  <a:t>Tempor ut in voluptate in nulla proident consectetur est do. Magna dolor aliquip consequat nisi ad occaecat laborum qui. Sed in qui elit aliquip sunt elit incididunt proident reprehenderit nostrud deserunt nulla. Consequat esse labore cupidatat enim anim irure do laborum quis. Fugiat nulla exercitation in velit labore et sunt velit do. Aliquip nostrud ullamco id qui commodo laboris labore eiusmod elit nulla ex ut.</a:t>
+                </a:r>
+                <a:endParaRPr lang="en-US" altLang="en-US" sz="900">
+                  <a:solidFill>
+                    <a:schemeClr val="bg1"/>
+                  </a:solidFill>
+                  <a:latin typeface="Comic Sans MS" panose="030F0702030302020204" charset="0"/>
+                  <a:cs typeface="Comic Sans MS" panose="030F0702030302020204" charset="0"/>
+                </a:endParaRPr>
+              </a:p>
+              <a:p>
+                <a:pPr algn="ctr"/>
+                <a:endParaRPr lang="en-US" altLang="en-US" sz="900">
+                  <a:solidFill>
+                    <a:schemeClr val="bg1"/>
+                  </a:solidFill>
+                  <a:latin typeface="Comic Sans MS" panose="030F0702030302020204" charset="0"/>
+                  <a:cs typeface="Comic Sans MS" panose="030F0702030302020204" charset="0"/>
+                </a:endParaRPr>
+              </a:p>
+            </p:txBody>
+          </p:sp>
+        </p:grpSp>
+      </p:grpSp>
+      <p:grpSp>
+        <p:nvGrpSpPr>
+          <p:cNvPr id="51" name="C"/>
+          <p:cNvGrpSpPr/>
+          <p:nvPr/>
+        </p:nvGrpSpPr>
+        <p:grpSpPr>
+          <a:xfrm>
+            <a:off x="-2301875" y="0"/>
+            <a:ext cx="3746500" cy="6921500"/>
+            <a:chOff x="9610" y="0"/>
+            <a:chExt cx="5900" cy="10900"/>
+          </a:xfrm>
+        </p:grpSpPr>
+        <p:sp>
+          <p:nvSpPr>
+            <p:cNvPr id="21" name="Rectangle 20"/>
+            <p:cNvSpPr/>
+            <p:nvPr/>
+          </p:nvSpPr>
+          <p:spPr>
+            <a:xfrm>
+              <a:off x="9610" y="0"/>
+              <a:ext cx="4790" cy="10900"/>
+            </a:xfrm>
+            <a:prstGeom prst="rect">
+              <a:avLst/>
+            </a:prstGeom>
+            <a:solidFill>
+              <a:srgbClr val="00B050"/>
+            </a:solidFill>
+            <a:ln>
+              <a:noFill/>
+            </a:ln>
+          </p:spPr>
+          <p:style>
+            <a:lnRef idx="2">
+              <a:schemeClr val="accent1">
+                <a:lumMod val="75000"/>
+              </a:schemeClr>
+            </a:lnRef>
+            <a:fillRef idx="1">
+              <a:schemeClr val="accent1"/>
+            </a:fillRef>
+            <a:effectRef idx="0">
+              <a:srgbClr val="FFFFFF"/>
+            </a:effectRef>
+            <a:fontRef idx="minor">
+              <a:schemeClr val="lt1"/>
+            </a:fontRef>
+          </p:style>
+          <p:txBody>
+            <a:bodyPr rtlCol="0" anchor="ctr"/>
+            <a:p>
+              <a:pPr algn="ctr"/>
+              <a:endParaRPr lang="en-US"/>
+            </a:p>
+          </p:txBody>
+        </p:sp>
+        <p:sp>
+          <p:nvSpPr>
+            <p:cNvPr id="25" name="Isosceles Triangle 24"/>
+            <p:cNvSpPr/>
+            <p:nvPr/>
+          </p:nvSpPr>
+          <p:spPr>
+            <a:xfrm rot="5400000">
+              <a:off x="13610" y="1890"/>
+              <a:ext cx="2720" cy="1080"/>
+            </a:xfrm>
+            <a:prstGeom prst="triangle">
+              <a:avLst/>
+            </a:prstGeom>
+            <a:solidFill>
+              <a:srgbClr val="00B050"/>
+            </a:solidFill>
+            <a:ln>
+              <a:noFill/>
+            </a:ln>
+          </p:spPr>
+          <p:style>
+            <a:lnRef idx="2">
+              <a:schemeClr val="accent1">
+                <a:lumMod val="75000"/>
+              </a:schemeClr>
+            </a:lnRef>
+            <a:fillRef idx="1">
+              <a:schemeClr val="accent1"/>
+            </a:fillRef>
+            <a:effectRef idx="0">
+              <a:srgbClr val="FFFFFF"/>
+            </a:effectRef>
+            <a:fontRef idx="minor">
+              <a:schemeClr val="lt1"/>
+            </a:fontRef>
+          </p:style>
+          <p:txBody>
+            <a:bodyPr rtlCol="0" anchor="ctr"/>
+            <a:p>
+              <a:pPr algn="ctr"/>
+              <a:endParaRPr lang="en-US"/>
+            </a:p>
+          </p:txBody>
+        </p:sp>
+        <p:sp>
+          <p:nvSpPr>
+            <p:cNvPr id="29" name="Text Box 28"/>
+            <p:cNvSpPr txBox="1"/>
+            <p:nvPr/>
+          </p:nvSpPr>
+          <p:spPr>
+            <a:xfrm>
+              <a:off x="11109" y="1310"/>
+              <a:ext cx="1819" cy="2080"/>
+            </a:xfrm>
+            <a:prstGeom prst="rect">
+              <a:avLst/>
+            </a:prstGeom>
+            <a:noFill/>
+          </p:spPr>
+          <p:txBody>
+            <a:bodyPr wrap="square" rtlCol="0">
+              <a:noAutofit/>
+            </a:bodyPr>
+            <a:p>
+              <a:pPr algn="ctr"/>
+              <a:r>
+                <a:rPr lang="en-US" sz="6600">
+                  <a:solidFill>
+                    <a:schemeClr val="bg1"/>
+                  </a:solidFill>
+                  <a:latin typeface="Comic Sans MS" panose="030F0702030302020204" charset="0"/>
+                  <a:cs typeface="Comic Sans MS" panose="030F0702030302020204" charset="0"/>
+                </a:rPr>
+                <a:t>C</a:t>
+              </a:r>
+              <a:endParaRPr lang="en-US" sz="6600">
+                <a:solidFill>
+                  <a:schemeClr val="bg1"/>
+                </a:solidFill>
+                <a:latin typeface="Comic Sans MS" panose="030F0702030302020204" charset="0"/>
+                <a:cs typeface="Comic Sans MS" panose="030F0702030302020204" charset="0"/>
+              </a:endParaRPr>
+            </a:p>
+          </p:txBody>
+        </p:sp>
+        <p:grpSp>
+          <p:nvGrpSpPr>
+            <p:cNvPr id="46" name="Group 45"/>
+            <p:cNvGrpSpPr/>
+            <p:nvPr/>
+          </p:nvGrpSpPr>
+          <p:grpSpPr>
+            <a:xfrm>
+              <a:off x="10376" y="3390"/>
+              <a:ext cx="3258" cy="3100"/>
+              <a:chOff x="752" y="3390"/>
+              <a:chExt cx="3258" cy="3100"/>
+            </a:xfrm>
+          </p:grpSpPr>
+          <p:sp>
+            <p:nvSpPr>
+              <p:cNvPr id="47" name="Text Box 46"/>
+              <p:cNvSpPr txBox="1"/>
+              <p:nvPr/>
+            </p:nvSpPr>
+            <p:spPr>
+              <a:xfrm>
+                <a:off x="752" y="3390"/>
+                <a:ext cx="3258" cy="2080"/>
+              </a:xfrm>
+              <a:prstGeom prst="rect">
+                <a:avLst/>
+              </a:prstGeom>
+              <a:noFill/>
+            </p:spPr>
+            <p:txBody>
+              <a:bodyPr wrap="square" rtlCol="0">
+                <a:noAutofit/>
+              </a:bodyPr>
+              <a:p>
+                <a:pPr algn="ctr"/>
+                <a:r>
+                  <a:rPr lang="en-US" sz="2000">
+                    <a:solidFill>
+                      <a:schemeClr val="bg1"/>
+                    </a:solidFill>
+                    <a:latin typeface="Comic Sans MS" panose="030F0702030302020204" charset="0"/>
+                    <a:cs typeface="Comic Sans MS" panose="030F0702030302020204" charset="0"/>
+                  </a:rPr>
+                  <a:t>Perkenalan</a:t>
+                </a:r>
+                <a:endParaRPr lang="en-US" sz="2000">
+                  <a:solidFill>
+                    <a:schemeClr val="bg1"/>
+                  </a:solidFill>
+                  <a:latin typeface="Comic Sans MS" panose="030F0702030302020204" charset="0"/>
+                  <a:cs typeface="Comic Sans MS" panose="030F0702030302020204" charset="0"/>
+                </a:endParaRPr>
+              </a:p>
+            </p:txBody>
+          </p:sp>
+          <p:sp>
+            <p:nvSpPr>
+              <p:cNvPr id="48" name="Text Box 47"/>
+              <p:cNvSpPr txBox="1"/>
+              <p:nvPr/>
+            </p:nvSpPr>
+            <p:spPr>
+              <a:xfrm>
+                <a:off x="752" y="4410"/>
+                <a:ext cx="3258" cy="2080"/>
+              </a:xfrm>
+              <a:prstGeom prst="rect">
+                <a:avLst/>
+              </a:prstGeom>
+              <a:noFill/>
+            </p:spPr>
+            <p:txBody>
+              <a:bodyPr wrap="square" rtlCol="0">
+                <a:noAutofit/>
+              </a:bodyPr>
+              <a:p>
+                <a:pPr algn="ctr"/>
+                <a:r>
+                  <a:rPr lang="en-US" altLang="en-US" sz="900">
+                    <a:solidFill>
+                      <a:schemeClr val="bg1"/>
+                    </a:solidFill>
+                    <a:latin typeface="Comic Sans MS" panose="030F0702030302020204" charset="0"/>
+                    <a:cs typeface="Comic Sans MS" panose="030F0702030302020204" charset="0"/>
+                  </a:rPr>
+                  <a:t>Lorem ipsum dolor sit amet, tempor fugiat velit exercitation qui. Velit non adipiscing fugiat reprehenderit cupidatat duis sed officia excepteur quis ut ullamco. Cillum irure proident aliqua sint anim fugiat in in adipiscing minim in aute.</a:t>
+                </a:r>
+                <a:endParaRPr lang="en-US" altLang="en-US" sz="900">
+                  <a:solidFill>
+                    <a:schemeClr val="bg1"/>
+                  </a:solidFill>
+                  <a:latin typeface="Comic Sans MS" panose="030F0702030302020204" charset="0"/>
+                  <a:cs typeface="Comic Sans MS" panose="030F0702030302020204" charset="0"/>
+                </a:endParaRPr>
+              </a:p>
+              <a:p>
+                <a:pPr algn="ctr"/>
+                <a:endParaRPr lang="en-US" altLang="en-US" sz="900">
+                  <a:solidFill>
+                    <a:schemeClr val="bg1"/>
+                  </a:solidFill>
+                  <a:latin typeface="Comic Sans MS" panose="030F0702030302020204" charset="0"/>
+                  <a:cs typeface="Comic Sans MS" panose="030F0702030302020204" charset="0"/>
+                </a:endParaRPr>
+              </a:p>
+              <a:p>
+                <a:pPr algn="ctr"/>
+                <a:r>
+                  <a:rPr lang="en-US" altLang="en-US" sz="900">
+                    <a:solidFill>
+                      <a:schemeClr val="bg1"/>
+                    </a:solidFill>
+                    <a:latin typeface="Comic Sans MS" panose="030F0702030302020204" charset="0"/>
+                    <a:cs typeface="Comic Sans MS" panose="030F0702030302020204" charset="0"/>
+                  </a:rPr>
+                  <a:t>Tempor ut in voluptate in nulla proident consectetur est do. Magna dolor aliquip consequat nisi ad occaecat laborum qui. Sed in qui elit aliquip sunt elit incididunt proident reprehenderit nostrud deserunt nulla. Consequat esse labore cupidatat enim anim irure do laborum quis. Fugiat nulla exercitation in velit labore et sunt velit do. Aliquip nostrud ullamco id qui commodo laboris labore eiusmod elit nulla ex ut.</a:t>
+                </a:r>
+                <a:endParaRPr lang="en-US" altLang="en-US" sz="900">
+                  <a:solidFill>
+                    <a:schemeClr val="bg1"/>
+                  </a:solidFill>
+                  <a:latin typeface="Comic Sans MS" panose="030F0702030302020204" charset="0"/>
+                  <a:cs typeface="Comic Sans MS" panose="030F0702030302020204" charset="0"/>
+                </a:endParaRPr>
+              </a:p>
+              <a:p>
+                <a:pPr algn="ctr"/>
+                <a:endParaRPr lang="en-US" altLang="en-US" sz="900">
+                  <a:solidFill>
+                    <a:schemeClr val="bg1"/>
+                  </a:solidFill>
+                  <a:latin typeface="Comic Sans MS" panose="030F0702030302020204" charset="0"/>
+                  <a:cs typeface="Comic Sans MS" panose="030F0702030302020204" charset="0"/>
+                </a:endParaRPr>
+              </a:p>
+            </p:txBody>
+          </p:sp>
+        </p:grpSp>
+      </p:grpSp>
+      <p:grpSp>
+        <p:nvGrpSpPr>
+          <p:cNvPr id="50" name="B"/>
+          <p:cNvGrpSpPr/>
+          <p:nvPr/>
+        </p:nvGrpSpPr>
+        <p:grpSpPr>
+          <a:xfrm>
+            <a:off x="-2414270" y="0"/>
+            <a:ext cx="3746500" cy="6921500"/>
+            <a:chOff x="4790" y="0"/>
+            <a:chExt cx="5900" cy="10900"/>
+          </a:xfrm>
+        </p:grpSpPr>
+        <p:sp>
+          <p:nvSpPr>
+            <p:cNvPr id="20" name="Rectangle 19"/>
+            <p:cNvSpPr/>
+            <p:nvPr/>
+          </p:nvSpPr>
+          <p:spPr>
+            <a:xfrm>
+              <a:off x="4790" y="0"/>
+              <a:ext cx="4820" cy="10900"/>
+            </a:xfrm>
+            <a:prstGeom prst="rect">
+              <a:avLst/>
+            </a:prstGeom>
+            <a:solidFill>
+              <a:schemeClr val="accent3">
+                <a:lumMod val="75000"/>
+              </a:schemeClr>
+            </a:solidFill>
+            <a:ln>
+              <a:noFill/>
+            </a:ln>
+          </p:spPr>
+          <p:style>
+            <a:lnRef idx="2">
+              <a:schemeClr val="accent1">
+                <a:lumMod val="75000"/>
+              </a:schemeClr>
+            </a:lnRef>
+            <a:fillRef idx="1">
+              <a:schemeClr val="accent1"/>
+            </a:fillRef>
+            <a:effectRef idx="0">
+              <a:srgbClr val="FFFFFF"/>
+            </a:effectRef>
+            <a:fontRef idx="minor">
+              <a:schemeClr val="lt1"/>
+            </a:fontRef>
+          </p:style>
+          <p:txBody>
+            <a:bodyPr rtlCol="0" anchor="ctr"/>
+            <a:p>
+              <a:pPr algn="ctr"/>
+              <a:endParaRPr lang="en-US"/>
+            </a:p>
+          </p:txBody>
+        </p:sp>
+        <p:sp>
+          <p:nvSpPr>
+            <p:cNvPr id="24" name="Isosceles Triangle 23"/>
+            <p:cNvSpPr/>
+            <p:nvPr/>
+          </p:nvSpPr>
+          <p:spPr>
+            <a:xfrm rot="5400000">
+              <a:off x="8790" y="1890"/>
+              <a:ext cx="2720" cy="1080"/>
+            </a:xfrm>
+            <a:prstGeom prst="triangle">
+              <a:avLst/>
+            </a:prstGeom>
+            <a:solidFill>
+              <a:srgbClr val="B68C02"/>
+            </a:solidFill>
+            <a:ln>
+              <a:noFill/>
+            </a:ln>
+          </p:spPr>
+          <p:style>
+            <a:lnRef idx="2">
+              <a:schemeClr val="accent1">
+                <a:lumMod val="75000"/>
+              </a:schemeClr>
+            </a:lnRef>
+            <a:fillRef idx="1">
+              <a:schemeClr val="accent1"/>
+            </a:fillRef>
+            <a:effectRef idx="0">
+              <a:srgbClr val="FFFFFF"/>
+            </a:effectRef>
+            <a:fontRef idx="minor">
+              <a:schemeClr val="lt1"/>
+            </a:fontRef>
+          </p:style>
+          <p:txBody>
+            <a:bodyPr rtlCol="0" anchor="ctr"/>
+            <a:p>
+              <a:pPr algn="ctr"/>
+              <a:endParaRPr lang="en-US"/>
+            </a:p>
+          </p:txBody>
+        </p:sp>
+        <p:sp>
+          <p:nvSpPr>
+            <p:cNvPr id="28" name="Text Box 27"/>
+            <p:cNvSpPr txBox="1"/>
+            <p:nvPr/>
+          </p:nvSpPr>
+          <p:spPr>
+            <a:xfrm>
+              <a:off x="6290" y="1310"/>
+              <a:ext cx="1819" cy="2080"/>
+            </a:xfrm>
+            <a:prstGeom prst="rect">
+              <a:avLst/>
+            </a:prstGeom>
+            <a:noFill/>
+          </p:spPr>
+          <p:txBody>
+            <a:bodyPr wrap="square" rtlCol="0">
+              <a:noAutofit/>
+            </a:bodyPr>
+            <a:p>
+              <a:pPr algn="ctr"/>
+              <a:r>
+                <a:rPr lang="en-US" sz="6600">
+                  <a:solidFill>
+                    <a:schemeClr val="bg1"/>
+                  </a:solidFill>
+                  <a:latin typeface="Comic Sans MS" panose="030F0702030302020204" charset="0"/>
+                  <a:cs typeface="Comic Sans MS" panose="030F0702030302020204" charset="0"/>
+                </a:rPr>
+                <a:t>B</a:t>
+              </a:r>
+              <a:endParaRPr lang="en-US" sz="6600">
+                <a:solidFill>
+                  <a:schemeClr val="bg1"/>
+                </a:solidFill>
+                <a:latin typeface="Comic Sans MS" panose="030F0702030302020204" charset="0"/>
+                <a:cs typeface="Comic Sans MS" panose="030F0702030302020204" charset="0"/>
+              </a:endParaRPr>
+            </a:p>
+          </p:txBody>
+        </p:sp>
+        <p:grpSp>
+          <p:nvGrpSpPr>
+            <p:cNvPr id="40" name="Group 39"/>
+            <p:cNvGrpSpPr/>
+            <p:nvPr/>
+          </p:nvGrpSpPr>
+          <p:grpSpPr>
+            <a:xfrm>
+              <a:off x="5571" y="3390"/>
+              <a:ext cx="3258" cy="3100"/>
+              <a:chOff x="752" y="3390"/>
+              <a:chExt cx="3258" cy="3100"/>
+            </a:xfrm>
+          </p:grpSpPr>
+          <p:sp>
+            <p:nvSpPr>
+              <p:cNvPr id="41" name="Text Box 40"/>
+              <p:cNvSpPr txBox="1"/>
+              <p:nvPr/>
+            </p:nvSpPr>
+            <p:spPr>
+              <a:xfrm>
+                <a:off x="752" y="3390"/>
+                <a:ext cx="3258" cy="2080"/>
+              </a:xfrm>
+              <a:prstGeom prst="rect">
+                <a:avLst/>
+              </a:prstGeom>
+              <a:noFill/>
+            </p:spPr>
+            <p:txBody>
+              <a:bodyPr wrap="square" rtlCol="0">
+                <a:noAutofit/>
+              </a:bodyPr>
+              <a:p>
+                <a:pPr algn="ctr"/>
+                <a:r>
+                  <a:rPr lang="en-US" sz="2000">
+                    <a:solidFill>
+                      <a:schemeClr val="bg1"/>
+                    </a:solidFill>
+                    <a:latin typeface="Comic Sans MS" panose="030F0702030302020204" charset="0"/>
+                    <a:cs typeface="Comic Sans MS" panose="030F0702030302020204" charset="0"/>
+                  </a:rPr>
+                  <a:t>Perkenalan</a:t>
+                </a:r>
+                <a:endParaRPr lang="en-US" sz="2000">
+                  <a:solidFill>
+                    <a:schemeClr val="bg1"/>
+                  </a:solidFill>
+                  <a:latin typeface="Comic Sans MS" panose="030F0702030302020204" charset="0"/>
+                  <a:cs typeface="Comic Sans MS" panose="030F0702030302020204" charset="0"/>
+                </a:endParaRPr>
+              </a:p>
+            </p:txBody>
+          </p:sp>
+          <p:sp>
+            <p:nvSpPr>
+              <p:cNvPr id="42" name="Text Box 41"/>
+              <p:cNvSpPr txBox="1"/>
+              <p:nvPr/>
+            </p:nvSpPr>
+            <p:spPr>
+              <a:xfrm>
+                <a:off x="752" y="4410"/>
+                <a:ext cx="3258" cy="2080"/>
+              </a:xfrm>
+              <a:prstGeom prst="rect">
+                <a:avLst/>
+              </a:prstGeom>
+              <a:noFill/>
+            </p:spPr>
+            <p:txBody>
+              <a:bodyPr wrap="square" rtlCol="0">
+                <a:noAutofit/>
+              </a:bodyPr>
+              <a:p>
+                <a:pPr algn="ctr"/>
+                <a:r>
+                  <a:rPr lang="en-US" altLang="en-US" sz="900">
+                    <a:solidFill>
+                      <a:schemeClr val="bg1"/>
+                    </a:solidFill>
+                    <a:latin typeface="Comic Sans MS" panose="030F0702030302020204" charset="0"/>
+                    <a:cs typeface="Comic Sans MS" panose="030F0702030302020204" charset="0"/>
+                  </a:rPr>
+                  <a:t>Lorem ipsum dolor sit amet, tempor fugiat velit exercitation qui. Velit non adipiscing fugiat reprehenderit cupidatat duis sed officia excepteur quis ut ullamco. Cillum irure proident aliqua sint anim fugiat in in adipiscing minim in aute.</a:t>
+                </a:r>
+                <a:endParaRPr lang="en-US" altLang="en-US" sz="900">
+                  <a:solidFill>
+                    <a:schemeClr val="bg1"/>
+                  </a:solidFill>
+                  <a:latin typeface="Comic Sans MS" panose="030F0702030302020204" charset="0"/>
+                  <a:cs typeface="Comic Sans MS" panose="030F0702030302020204" charset="0"/>
+                </a:endParaRPr>
+              </a:p>
+              <a:p>
+                <a:pPr algn="ctr"/>
+                <a:endParaRPr lang="en-US" altLang="en-US" sz="900">
+                  <a:solidFill>
+                    <a:schemeClr val="bg1"/>
+                  </a:solidFill>
+                  <a:latin typeface="Comic Sans MS" panose="030F0702030302020204" charset="0"/>
+                  <a:cs typeface="Comic Sans MS" panose="030F0702030302020204" charset="0"/>
+                </a:endParaRPr>
+              </a:p>
+              <a:p>
+                <a:pPr algn="ctr"/>
+                <a:r>
+                  <a:rPr lang="en-US" altLang="en-US" sz="900">
+                    <a:solidFill>
+                      <a:schemeClr val="bg1"/>
+                    </a:solidFill>
+                    <a:latin typeface="Comic Sans MS" panose="030F0702030302020204" charset="0"/>
+                    <a:cs typeface="Comic Sans MS" panose="030F0702030302020204" charset="0"/>
+                  </a:rPr>
+                  <a:t>Tempor ut in voluptate in nulla proident consectetur est do. Magna dolor aliquip consequat nisi ad occaecat laborum qui. Sed in qui elit aliquip sunt elit incididunt proident reprehenderit nostrud deserunt nulla. Consequat esse labore cupidatat enim anim irure do laborum quis. Fugiat nulla exercitation in velit labore et sunt velit do. Aliquip nostrud ullamco id qui commodo laboris labore eiusmod elit nulla ex ut.</a:t>
+                </a:r>
+                <a:endParaRPr lang="en-US" altLang="en-US" sz="900">
+                  <a:solidFill>
+                    <a:schemeClr val="bg1"/>
+                  </a:solidFill>
+                  <a:latin typeface="Comic Sans MS" panose="030F0702030302020204" charset="0"/>
+                  <a:cs typeface="Comic Sans MS" panose="030F0702030302020204" charset="0"/>
+                </a:endParaRPr>
+              </a:p>
+              <a:p>
+                <a:pPr algn="ctr"/>
+                <a:endParaRPr lang="en-US" altLang="en-US" sz="900">
+                  <a:solidFill>
+                    <a:schemeClr val="bg1"/>
+                  </a:solidFill>
+                  <a:latin typeface="Comic Sans MS" panose="030F0702030302020204" charset="0"/>
+                  <a:cs typeface="Comic Sans MS" panose="030F0702030302020204" charset="0"/>
+                </a:endParaRPr>
+              </a:p>
+            </p:txBody>
+          </p:sp>
+        </p:grpSp>
+      </p:grpSp>
+      <p:grpSp>
+        <p:nvGrpSpPr>
+          <p:cNvPr id="49" name="A"/>
+          <p:cNvGrpSpPr/>
+          <p:nvPr/>
+        </p:nvGrpSpPr>
+        <p:grpSpPr>
+          <a:xfrm>
+            <a:off x="-2623185" y="0"/>
+            <a:ext cx="3746500" cy="6921500"/>
+            <a:chOff x="-30" y="0"/>
+            <a:chExt cx="5900" cy="10900"/>
+          </a:xfrm>
+        </p:grpSpPr>
+        <p:sp>
+          <p:nvSpPr>
+            <p:cNvPr id="19" name="Rectangle 18"/>
+            <p:cNvSpPr/>
+            <p:nvPr/>
+          </p:nvSpPr>
+          <p:spPr>
+            <a:xfrm>
+              <a:off x="-30" y="0"/>
+              <a:ext cx="4820" cy="10900"/>
+            </a:xfrm>
+            <a:prstGeom prst="rect">
+              <a:avLst/>
+            </a:prstGeom>
+            <a:solidFill>
+              <a:srgbClr val="FF0000"/>
+            </a:solidFill>
+            <a:ln>
+              <a:noFill/>
+            </a:ln>
+          </p:spPr>
+          <p:style>
+            <a:lnRef idx="2">
+              <a:schemeClr val="accent1">
+                <a:lumMod val="75000"/>
+              </a:schemeClr>
+            </a:lnRef>
+            <a:fillRef idx="1">
+              <a:schemeClr val="accent1"/>
+            </a:fillRef>
+            <a:effectRef idx="0">
+              <a:srgbClr val="FFFFFF"/>
+            </a:effectRef>
+            <a:fontRef idx="minor">
+              <a:schemeClr val="lt1"/>
+            </a:fontRef>
+          </p:style>
+          <p:txBody>
+            <a:bodyPr rtlCol="0" anchor="ctr"/>
+            <a:p>
+              <a:pPr algn="ctr"/>
+              <a:endParaRPr lang="en-US"/>
+            </a:p>
+          </p:txBody>
+        </p:sp>
+        <p:sp>
+          <p:nvSpPr>
+            <p:cNvPr id="23" name="Isosceles Triangle 22"/>
+            <p:cNvSpPr/>
+            <p:nvPr/>
+          </p:nvSpPr>
+          <p:spPr>
+            <a:xfrm rot="5400000">
+              <a:off x="3970" y="2130"/>
+              <a:ext cx="2720" cy="1080"/>
+            </a:xfrm>
+            <a:prstGeom prst="triangle">
+              <a:avLst/>
+            </a:prstGeom>
+            <a:solidFill>
+              <a:srgbClr val="FF0000"/>
+            </a:solidFill>
+            <a:ln>
+              <a:noFill/>
+            </a:ln>
+          </p:spPr>
+          <p:style>
+            <a:lnRef idx="2">
+              <a:schemeClr val="accent1">
+                <a:lumMod val="75000"/>
+              </a:schemeClr>
+            </a:lnRef>
+            <a:fillRef idx="1">
+              <a:schemeClr val="accent1"/>
+            </a:fillRef>
+            <a:effectRef idx="0">
+              <a:srgbClr val="FFFFFF"/>
+            </a:effectRef>
+            <a:fontRef idx="minor">
+              <a:schemeClr val="lt1"/>
+            </a:fontRef>
+          </p:style>
+          <p:txBody>
+            <a:bodyPr rtlCol="0" anchor="ctr"/>
+            <a:p>
+              <a:pPr algn="ctr"/>
+              <a:endParaRPr lang="en-US"/>
+            </a:p>
+          </p:txBody>
+        </p:sp>
+        <p:sp>
+          <p:nvSpPr>
+            <p:cNvPr id="27" name="Text Box 26"/>
+            <p:cNvSpPr txBox="1"/>
+            <p:nvPr/>
+          </p:nvSpPr>
+          <p:spPr>
+            <a:xfrm>
+              <a:off x="1471" y="1310"/>
+              <a:ext cx="1819" cy="2080"/>
+            </a:xfrm>
+            <a:prstGeom prst="rect">
+              <a:avLst/>
+            </a:prstGeom>
+            <a:noFill/>
+          </p:spPr>
+          <p:txBody>
+            <a:bodyPr wrap="square" rtlCol="0">
+              <a:noAutofit/>
+            </a:bodyPr>
+            <a:p>
+              <a:pPr algn="ctr"/>
+              <a:r>
+                <a:rPr lang="en-US" sz="6600">
+                  <a:solidFill>
+                    <a:schemeClr val="bg1"/>
+                  </a:solidFill>
+                  <a:latin typeface="Comic Sans MS" panose="030F0702030302020204" charset="0"/>
+                  <a:cs typeface="Comic Sans MS" panose="030F0702030302020204" charset="0"/>
+                </a:rPr>
+                <a:t>A</a:t>
+              </a:r>
+              <a:endParaRPr lang="en-US" sz="6600">
+                <a:solidFill>
+                  <a:schemeClr val="bg1"/>
+                </a:solidFill>
+                <a:latin typeface="Comic Sans MS" panose="030F0702030302020204" charset="0"/>
+                <a:cs typeface="Comic Sans MS" panose="030F0702030302020204" charset="0"/>
+              </a:endParaRPr>
+            </a:p>
+          </p:txBody>
+        </p:sp>
+        <p:grpSp>
+          <p:nvGrpSpPr>
+            <p:cNvPr id="39" name="Group 38"/>
+            <p:cNvGrpSpPr/>
+            <p:nvPr/>
+          </p:nvGrpSpPr>
+          <p:grpSpPr>
+            <a:xfrm>
+              <a:off x="752" y="3390"/>
+              <a:ext cx="3258" cy="3100"/>
+              <a:chOff x="752" y="3390"/>
+              <a:chExt cx="3258" cy="3100"/>
+            </a:xfrm>
+          </p:grpSpPr>
+          <p:sp>
+            <p:nvSpPr>
+              <p:cNvPr id="31" name="Text Box 30"/>
+              <p:cNvSpPr txBox="1"/>
+              <p:nvPr/>
+            </p:nvSpPr>
+            <p:spPr>
+              <a:xfrm>
+                <a:off x="752" y="3390"/>
+                <a:ext cx="3258" cy="2080"/>
+              </a:xfrm>
+              <a:prstGeom prst="rect">
+                <a:avLst/>
+              </a:prstGeom>
+              <a:noFill/>
+            </p:spPr>
+            <p:txBody>
+              <a:bodyPr wrap="square" rtlCol="0">
+                <a:noAutofit/>
+              </a:bodyPr>
+              <a:p>
+                <a:pPr algn="ctr"/>
+                <a:r>
+                  <a:rPr lang="en-US" sz="2000">
+                    <a:solidFill>
+                      <a:schemeClr val="bg1"/>
+                    </a:solidFill>
+                    <a:latin typeface="Comic Sans MS" panose="030F0702030302020204" charset="0"/>
+                    <a:cs typeface="Comic Sans MS" panose="030F0702030302020204" charset="0"/>
+                  </a:rPr>
+                  <a:t>Perkenalan</a:t>
+                </a:r>
+                <a:endParaRPr lang="en-US" sz="2000">
+                  <a:solidFill>
+                    <a:schemeClr val="bg1"/>
+                  </a:solidFill>
+                  <a:latin typeface="Comic Sans MS" panose="030F0702030302020204" charset="0"/>
+                  <a:cs typeface="Comic Sans MS" panose="030F0702030302020204" charset="0"/>
+                </a:endParaRPr>
+              </a:p>
+            </p:txBody>
+          </p:sp>
+          <p:sp>
+            <p:nvSpPr>
+              <p:cNvPr id="32" name="Text Box 31"/>
+              <p:cNvSpPr txBox="1"/>
+              <p:nvPr/>
+            </p:nvSpPr>
+            <p:spPr>
+              <a:xfrm>
+                <a:off x="752" y="4410"/>
+                <a:ext cx="3258" cy="2080"/>
+              </a:xfrm>
+              <a:prstGeom prst="rect">
+                <a:avLst/>
+              </a:prstGeom>
+              <a:noFill/>
+            </p:spPr>
+            <p:txBody>
+              <a:bodyPr wrap="square" rtlCol="0">
+                <a:noAutofit/>
+              </a:bodyPr>
+              <a:p>
+                <a:pPr algn="ctr"/>
+                <a:r>
+                  <a:rPr lang="en-US" altLang="en-US" sz="900">
+                    <a:solidFill>
+                      <a:schemeClr val="bg1"/>
+                    </a:solidFill>
+                    <a:latin typeface="Comic Sans MS" panose="030F0702030302020204" charset="0"/>
+                    <a:cs typeface="Comic Sans MS" panose="030F0702030302020204" charset="0"/>
+                  </a:rPr>
+                  <a:t>Lorem ipsum dolor sit amet, tempor fugiat velit exercitation qui. Velit non adipiscing fugiat reprehenderit cupidatat duis sed officia excepteur quis ut ullamco. Cillum irure proident aliqua sint anim fugiat in in adipiscing minim in aute.</a:t>
+                </a:r>
+                <a:endParaRPr lang="en-US" altLang="en-US" sz="900">
+                  <a:solidFill>
+                    <a:schemeClr val="bg1"/>
+                  </a:solidFill>
+                  <a:latin typeface="Comic Sans MS" panose="030F0702030302020204" charset="0"/>
+                  <a:cs typeface="Comic Sans MS" panose="030F0702030302020204" charset="0"/>
+                </a:endParaRPr>
+              </a:p>
+              <a:p>
+                <a:pPr algn="ctr"/>
+                <a:endParaRPr lang="en-US" altLang="en-US" sz="900">
+                  <a:solidFill>
+                    <a:schemeClr val="bg1"/>
+                  </a:solidFill>
+                  <a:latin typeface="Comic Sans MS" panose="030F0702030302020204" charset="0"/>
+                  <a:cs typeface="Comic Sans MS" panose="030F0702030302020204" charset="0"/>
+                </a:endParaRPr>
+              </a:p>
+              <a:p>
+                <a:pPr algn="ctr"/>
+                <a:r>
+                  <a:rPr lang="en-US" altLang="en-US" sz="900">
+                    <a:solidFill>
+                      <a:schemeClr val="bg1"/>
+                    </a:solidFill>
+                    <a:latin typeface="Comic Sans MS" panose="030F0702030302020204" charset="0"/>
+                    <a:cs typeface="Comic Sans MS" panose="030F0702030302020204" charset="0"/>
+                  </a:rPr>
+                  <a:t>Tempor ut in voluptate in nulla proident consectetur est do. Magna dolor aliquip consequat nisi ad occaecat laborum qui. Sed in qui elit aliquip sunt elit incididunt proident reprehenderit nostrud deserunt nulla. Consequat esse labore cupidatat enim anim irure do laborum quis. Fugiat nulla exercitation in velit labore et sunt velit do. Aliquip nostrud ullamco id qui commodo laboris labore eiusmod elit nulla ex ut.</a:t>
+                </a:r>
+                <a:endParaRPr lang="en-US" altLang="en-US" sz="900">
+                  <a:solidFill>
+                    <a:schemeClr val="bg1"/>
+                  </a:solidFill>
+                  <a:latin typeface="Comic Sans MS" panose="030F0702030302020204" charset="0"/>
+                  <a:cs typeface="Comic Sans MS" panose="030F0702030302020204" charset="0"/>
+                </a:endParaRPr>
+              </a:p>
+              <a:p>
+                <a:pPr algn="ctr"/>
+                <a:endParaRPr lang="en-US" altLang="en-US" sz="900">
+                  <a:solidFill>
+                    <a:schemeClr val="bg1"/>
+                  </a:solidFill>
+                  <a:latin typeface="Comic Sans MS" panose="030F0702030302020204" charset="0"/>
+                  <a:cs typeface="Comic Sans MS" panose="030F0702030302020204" charset="0"/>
+                </a:endParaRPr>
+              </a:p>
+            </p:txBody>
+          </p:sp>
+        </p:grpSp>
+      </p:grpSp>
+    </p:spTree>
+    <p:custDataLst>
+      <p:tags r:id="rId1"/>
+    </p:custDataLst>
+  </p:cSld>
+  <p:clrMapOvr>
+    <a:masterClrMapping/>
+  </p:clrMapOvr>
+  <mc:AlternateContent xmlns:mc="http://schemas.openxmlformats.org/markup-compatibility/2006">
+    <mc:Choice xmlns:p14="http://schemas.microsoft.com/office/powerpoint/2010/main" Requires="p14">
+      <p:transition spd="slow" p14:dur="2000"/>
+    </mc:Choice>
+    <mc:Fallback>
+      <p:transition spd="slow"/>
+    </mc:Fallback>
+  </mc:AlternateContent>
+</p:sld>
+</file>
+
+<file path=ppt/slides/slide2.xml><?xml version="1.0" encoding="utf-8"?>
+<p:sld xmlns:a="http://schemas.openxmlformats.org/drawingml/2006/main" xmlns:r="http://schemas.openxmlformats.org/officeDocument/2006/relationships" xmlns:p="http://schemas.openxmlformats.org/presentationml/2006/main">
+  <p:cSld>
+    <p:spTree>
+      <p:nvGrpSpPr>
+        <p:cNvPr id="1" name=""/>
+        <p:cNvGrpSpPr/>
+        <p:nvPr/>
+      </p:nvGrpSpPr>
+      <p:grpSpPr>
+        <a:xfrm>
+          <a:off x="0" y="0"/>
+          <a:ext cx="0" cy="0"/>
+          <a:chOff x="0" y="0"/>
+          <a:chExt cx="0" cy="0"/>
+        </a:xfrm>
+      </p:grpSpPr>
+      <p:sp>
+        <p:nvSpPr>
+          <p:cNvPr id="2" name="Text Box 1"/>
+          <p:cNvSpPr txBox="1"/>
+          <p:nvPr/>
+        </p:nvSpPr>
+        <p:spPr>
+          <a:xfrm>
+            <a:off x="1979930" y="2406650"/>
+            <a:ext cx="8731250" cy="1861185"/>
+          </a:xfrm>
+          <a:prstGeom prst="rect">
+            <a:avLst/>
+          </a:prstGeom>
+          <a:noFill/>
+        </p:spPr>
+        <p:txBody>
+          <a:bodyPr wrap="square" rtlCol="0">
+            <a:spAutoFit/>
+          </a:bodyPr>
+          <a:p>
+            <a:pPr algn="ctr"/>
+            <a:r>
+              <a:rPr lang="en-US" sz="11500" b="1"/>
+              <a:t>WELCOME</a:t>
+            </a:r>
+            <a:endParaRPr lang="en-US" sz="11500" b="1"/>
+          </a:p>
+        </p:txBody>
+      </p:sp>
       <p:grpSp>
         <p:nvGrpSpPr>
           <p:cNvPr id="52" name="Group 51"/>
@@ -7617,1191 +8856,16 @@
   <p:clrMapOvr>
     <a:masterClrMapping/>
   </p:clrMapOvr>
-  <mc:AlternateContent xmlns:mc="http://schemas.openxmlformats.org/markup-compatibility/2006">
-    <mc:Choice xmlns:p14="http://schemas.microsoft.com/office/powerpoint/2010/main" Requires="p14">
-      <p:transition spd="slow" p14:dur="2000"/>
+  <mc:AlternateContent xmlns:mc="http://schemas.openxmlformats.org/markup-compatibility/2006" xmlns:p159="http://schemas.microsoft.com/office/powerpoint/2015/09/main">
+    <mc:Choice Requires="p159">
+      <p:transition xmlns:p14="http://schemas.microsoft.com/office/powerpoint/2010/main" spd="slow" p14:dur="2000">
+        <p159:morph option="byObject"/>
+      </p:transition>
     </mc:Choice>
     <mc:Fallback>
-      <p:transition spd="slow"/>
-    </mc:Fallback>
-  </mc:AlternateContent>
-</p:sld>
-</file>
-
-<file path=ppt/slides/slide2.xml><?xml version="1.0" encoding="utf-8"?>
-<p:sld xmlns:a="http://schemas.openxmlformats.org/drawingml/2006/main" xmlns:r="http://schemas.openxmlformats.org/officeDocument/2006/relationships" xmlns:p="http://schemas.openxmlformats.org/presentationml/2006/main">
-  <p:cSld>
-    <p:spTree>
-      <p:nvGrpSpPr>
-        <p:cNvPr id="1" name=""/>
-        <p:cNvGrpSpPr/>
-        <p:nvPr/>
-      </p:nvGrpSpPr>
-      <p:grpSpPr>
-        <a:xfrm>
-          <a:off x="0" y="0"/>
-          <a:ext cx="0" cy="0"/>
-          <a:chOff x="0" y="0"/>
-          <a:chExt cx="0" cy="0"/>
-        </a:xfrm>
-      </p:grpSpPr>
-      <p:grpSp>
-        <p:nvGrpSpPr>
-          <p:cNvPr id="52" name="D"/>
-          <p:cNvGrpSpPr/>
-          <p:nvPr/>
-        </p:nvGrpSpPr>
-        <p:grpSpPr>
-          <a:xfrm>
-            <a:off x="9144000" y="0"/>
-            <a:ext cx="3746500" cy="6921500"/>
-            <a:chOff x="14400" y="0"/>
-            <a:chExt cx="5900" cy="10900"/>
-          </a:xfrm>
-        </p:grpSpPr>
-        <p:sp>
-          <p:nvSpPr>
-            <p:cNvPr id="22" name="Rectangle 21"/>
-            <p:cNvSpPr/>
-            <p:nvPr/>
-          </p:nvSpPr>
-          <p:spPr>
-            <a:xfrm>
-              <a:off x="14400" y="0"/>
-              <a:ext cx="4820" cy="10900"/>
-            </a:xfrm>
-            <a:prstGeom prst="rect">
-              <a:avLst/>
-            </a:prstGeom>
-            <a:ln>
-              <a:noFill/>
-            </a:ln>
-          </p:spPr>
-          <p:style>
-            <a:lnRef idx="2">
-              <a:schemeClr val="accent1">
-                <a:lumMod val="75000"/>
-              </a:schemeClr>
-            </a:lnRef>
-            <a:fillRef idx="1">
-              <a:schemeClr val="accent1"/>
-            </a:fillRef>
-            <a:effectRef idx="0">
-              <a:srgbClr val="FFFFFF"/>
-            </a:effectRef>
-            <a:fontRef idx="minor">
-              <a:schemeClr val="lt1"/>
-            </a:fontRef>
-          </p:style>
-          <p:txBody>
-            <a:bodyPr rtlCol="0" anchor="ctr"/>
-            <a:p>
-              <a:pPr algn="ctr"/>
-              <a:endParaRPr lang="en-US"/>
-            </a:p>
-          </p:txBody>
-        </p:sp>
-        <p:sp>
-          <p:nvSpPr>
-            <p:cNvPr id="26" name="Isosceles Triangle 25"/>
-            <p:cNvSpPr/>
-            <p:nvPr/>
-          </p:nvSpPr>
-          <p:spPr>
-            <a:xfrm rot="5400000">
-              <a:off x="18400" y="1890"/>
-              <a:ext cx="2720" cy="1080"/>
-            </a:xfrm>
-            <a:prstGeom prst="triangle">
-              <a:avLst/>
-            </a:prstGeom>
-            <a:solidFill>
-              <a:srgbClr val="4874CB"/>
-            </a:solidFill>
-            <a:ln>
-              <a:noFill/>
-            </a:ln>
-          </p:spPr>
-          <p:style>
-            <a:lnRef idx="2">
-              <a:schemeClr val="accent1">
-                <a:lumMod val="75000"/>
-              </a:schemeClr>
-            </a:lnRef>
-            <a:fillRef idx="1">
-              <a:schemeClr val="accent1"/>
-            </a:fillRef>
-            <a:effectRef idx="0">
-              <a:srgbClr val="FFFFFF"/>
-            </a:effectRef>
-            <a:fontRef idx="minor">
-              <a:schemeClr val="lt1"/>
-            </a:fontRef>
-          </p:style>
-          <p:txBody>
-            <a:bodyPr rtlCol="0" anchor="ctr"/>
-            <a:p>
-              <a:pPr algn="ctr"/>
-              <a:endParaRPr lang="en-US"/>
-            </a:p>
-          </p:txBody>
-        </p:sp>
-        <p:sp>
-          <p:nvSpPr>
-            <p:cNvPr id="30" name="Text Box 29"/>
-            <p:cNvSpPr txBox="1"/>
-            <p:nvPr/>
-          </p:nvSpPr>
-          <p:spPr>
-            <a:xfrm>
-              <a:off x="15928" y="1310"/>
-              <a:ext cx="1819" cy="2080"/>
-            </a:xfrm>
-            <a:prstGeom prst="rect">
-              <a:avLst/>
-            </a:prstGeom>
-            <a:noFill/>
-          </p:spPr>
-          <p:txBody>
-            <a:bodyPr wrap="square" rtlCol="0">
-              <a:noAutofit/>
-            </a:bodyPr>
-            <a:p>
-              <a:pPr algn="ctr"/>
-              <a:r>
-                <a:rPr lang="en-US" sz="6600">
-                  <a:solidFill>
-                    <a:schemeClr val="bg1"/>
-                  </a:solidFill>
-                  <a:latin typeface="Comic Sans MS" panose="030F0702030302020204" charset="0"/>
-                  <a:cs typeface="Comic Sans MS" panose="030F0702030302020204" charset="0"/>
-                </a:rPr>
-                <a:t>D</a:t>
-              </a:r>
-              <a:endParaRPr lang="en-US" sz="6600">
-                <a:solidFill>
-                  <a:schemeClr val="bg1"/>
-                </a:solidFill>
-                <a:latin typeface="Comic Sans MS" panose="030F0702030302020204" charset="0"/>
-                <a:cs typeface="Comic Sans MS" panose="030F0702030302020204" charset="0"/>
-              </a:endParaRPr>
-            </a:p>
-          </p:txBody>
-        </p:sp>
-        <p:grpSp>
-          <p:nvGrpSpPr>
-            <p:cNvPr id="43" name="Group 42"/>
-            <p:cNvGrpSpPr/>
-            <p:nvPr/>
-          </p:nvGrpSpPr>
-          <p:grpSpPr>
-            <a:xfrm>
-              <a:off x="15181" y="3390"/>
-              <a:ext cx="3258" cy="3100"/>
-              <a:chOff x="752" y="3390"/>
-              <a:chExt cx="3258" cy="3100"/>
-            </a:xfrm>
-          </p:grpSpPr>
-          <p:sp>
-            <p:nvSpPr>
-              <p:cNvPr id="44" name="Text Box 43"/>
-              <p:cNvSpPr txBox="1"/>
-              <p:nvPr/>
-            </p:nvSpPr>
-            <p:spPr>
-              <a:xfrm>
-                <a:off x="752" y="3390"/>
-                <a:ext cx="3258" cy="2080"/>
-              </a:xfrm>
-              <a:prstGeom prst="rect">
-                <a:avLst/>
-              </a:prstGeom>
-              <a:noFill/>
-            </p:spPr>
-            <p:txBody>
-              <a:bodyPr wrap="square" rtlCol="0">
-                <a:noAutofit/>
-              </a:bodyPr>
-              <a:p>
-                <a:pPr algn="ctr"/>
-                <a:r>
-                  <a:rPr lang="en-US" sz="2000">
-                    <a:solidFill>
-                      <a:schemeClr val="bg1"/>
-                    </a:solidFill>
-                    <a:latin typeface="Comic Sans MS" panose="030F0702030302020204" charset="0"/>
-                    <a:cs typeface="Comic Sans MS" panose="030F0702030302020204" charset="0"/>
-                  </a:rPr>
-                  <a:t>Perkenalan</a:t>
-                </a:r>
-                <a:endParaRPr lang="en-US" sz="2000">
-                  <a:solidFill>
-                    <a:schemeClr val="bg1"/>
-                  </a:solidFill>
-                  <a:latin typeface="Comic Sans MS" panose="030F0702030302020204" charset="0"/>
-                  <a:cs typeface="Comic Sans MS" panose="030F0702030302020204" charset="0"/>
-                </a:endParaRPr>
-              </a:p>
-            </p:txBody>
-          </p:sp>
-          <p:sp>
-            <p:nvSpPr>
-              <p:cNvPr id="45" name="Text Box 44"/>
-              <p:cNvSpPr txBox="1"/>
-              <p:nvPr/>
-            </p:nvSpPr>
-            <p:spPr>
-              <a:xfrm>
-                <a:off x="752" y="4410"/>
-                <a:ext cx="3258" cy="2080"/>
-              </a:xfrm>
-              <a:prstGeom prst="rect">
-                <a:avLst/>
-              </a:prstGeom>
-              <a:noFill/>
-            </p:spPr>
-            <p:txBody>
-              <a:bodyPr wrap="square" rtlCol="0">
-                <a:noAutofit/>
-              </a:bodyPr>
-              <a:p>
-                <a:pPr algn="ctr"/>
-                <a:r>
-                  <a:rPr lang="en-US" altLang="en-US" sz="900">
-                    <a:solidFill>
-                      <a:schemeClr val="bg1"/>
-                    </a:solidFill>
-                    <a:latin typeface="Comic Sans MS" panose="030F0702030302020204" charset="0"/>
-                    <a:cs typeface="Comic Sans MS" panose="030F0702030302020204" charset="0"/>
-                  </a:rPr>
-                  <a:t>Lorem ipsum dolor sit amet, tempor fugiat velit exercitation qui. Velit non adipiscing fugiat reprehenderit cupidatat duis sed officia excepteur quis ut ullamco. Cillum irure proident aliqua sint anim fugiat in in adipiscing minim in aute.</a:t>
-                </a:r>
-                <a:endParaRPr lang="en-US" altLang="en-US" sz="900">
-                  <a:solidFill>
-                    <a:schemeClr val="bg1"/>
-                  </a:solidFill>
-                  <a:latin typeface="Comic Sans MS" panose="030F0702030302020204" charset="0"/>
-                  <a:cs typeface="Comic Sans MS" panose="030F0702030302020204" charset="0"/>
-                </a:endParaRPr>
-              </a:p>
-              <a:p>
-                <a:pPr algn="ctr"/>
-                <a:endParaRPr lang="en-US" altLang="en-US" sz="900">
-                  <a:solidFill>
-                    <a:schemeClr val="bg1"/>
-                  </a:solidFill>
-                  <a:latin typeface="Comic Sans MS" panose="030F0702030302020204" charset="0"/>
-                  <a:cs typeface="Comic Sans MS" panose="030F0702030302020204" charset="0"/>
-                </a:endParaRPr>
-              </a:p>
-              <a:p>
-                <a:pPr algn="ctr"/>
-                <a:r>
-                  <a:rPr lang="en-US" altLang="en-US" sz="900">
-                    <a:solidFill>
-                      <a:schemeClr val="bg1"/>
-                    </a:solidFill>
-                    <a:latin typeface="Comic Sans MS" panose="030F0702030302020204" charset="0"/>
-                    <a:cs typeface="Comic Sans MS" panose="030F0702030302020204" charset="0"/>
-                  </a:rPr>
-                  <a:t>Tempor ut in voluptate in nulla proident consectetur est do. Magna dolor aliquip consequat nisi ad occaecat laborum qui. Sed in qui elit aliquip sunt elit incididunt proident reprehenderit nostrud deserunt nulla. Consequat esse labore cupidatat enim anim irure do laborum quis. Fugiat nulla exercitation in velit labore et sunt velit do. Aliquip nostrud ullamco id qui commodo laboris labore eiusmod elit nulla ex ut.</a:t>
-                </a:r>
-                <a:endParaRPr lang="en-US" altLang="en-US" sz="900">
-                  <a:solidFill>
-                    <a:schemeClr val="bg1"/>
-                  </a:solidFill>
-                  <a:latin typeface="Comic Sans MS" panose="030F0702030302020204" charset="0"/>
-                  <a:cs typeface="Comic Sans MS" panose="030F0702030302020204" charset="0"/>
-                </a:endParaRPr>
-              </a:p>
-              <a:p>
-                <a:pPr algn="ctr"/>
-                <a:endParaRPr lang="en-US" altLang="en-US" sz="900">
-                  <a:solidFill>
-                    <a:schemeClr val="bg1"/>
-                  </a:solidFill>
-                  <a:latin typeface="Comic Sans MS" panose="030F0702030302020204" charset="0"/>
-                  <a:cs typeface="Comic Sans MS" panose="030F0702030302020204" charset="0"/>
-                </a:endParaRPr>
-              </a:p>
-            </p:txBody>
-          </p:sp>
-        </p:grpSp>
-      </p:grpSp>
-      <p:grpSp>
-        <p:nvGrpSpPr>
-          <p:cNvPr id="51" name="C"/>
-          <p:cNvGrpSpPr/>
-          <p:nvPr/>
-        </p:nvGrpSpPr>
-        <p:grpSpPr>
-          <a:xfrm>
-            <a:off x="6102350" y="0"/>
-            <a:ext cx="3746500" cy="6921500"/>
-            <a:chOff x="9610" y="0"/>
-            <a:chExt cx="5900" cy="10900"/>
-          </a:xfrm>
-        </p:grpSpPr>
-        <p:sp>
-          <p:nvSpPr>
-            <p:cNvPr id="21" name="Rectangle 20"/>
-            <p:cNvSpPr/>
-            <p:nvPr/>
-          </p:nvSpPr>
-          <p:spPr>
-            <a:xfrm>
-              <a:off x="9610" y="0"/>
-              <a:ext cx="4790" cy="10900"/>
-            </a:xfrm>
-            <a:prstGeom prst="rect">
-              <a:avLst/>
-            </a:prstGeom>
-            <a:solidFill>
-              <a:srgbClr val="00B050"/>
-            </a:solidFill>
-            <a:ln>
-              <a:noFill/>
-            </a:ln>
-          </p:spPr>
-          <p:style>
-            <a:lnRef idx="2">
-              <a:schemeClr val="accent1">
-                <a:lumMod val="75000"/>
-              </a:schemeClr>
-            </a:lnRef>
-            <a:fillRef idx="1">
-              <a:schemeClr val="accent1"/>
-            </a:fillRef>
-            <a:effectRef idx="0">
-              <a:srgbClr val="FFFFFF"/>
-            </a:effectRef>
-            <a:fontRef idx="minor">
-              <a:schemeClr val="lt1"/>
-            </a:fontRef>
-          </p:style>
-          <p:txBody>
-            <a:bodyPr rtlCol="0" anchor="ctr"/>
-            <a:p>
-              <a:pPr algn="ctr"/>
-              <a:endParaRPr lang="en-US"/>
-            </a:p>
-          </p:txBody>
-        </p:sp>
-        <p:sp>
-          <p:nvSpPr>
-            <p:cNvPr id="25" name="Isosceles Triangle 24"/>
-            <p:cNvSpPr/>
-            <p:nvPr/>
-          </p:nvSpPr>
-          <p:spPr>
-            <a:xfrm rot="5400000">
-              <a:off x="13610" y="1890"/>
-              <a:ext cx="2720" cy="1080"/>
-            </a:xfrm>
-            <a:prstGeom prst="triangle">
-              <a:avLst/>
-            </a:prstGeom>
-            <a:solidFill>
-              <a:srgbClr val="00B050"/>
-            </a:solidFill>
-            <a:ln>
-              <a:noFill/>
-            </a:ln>
-          </p:spPr>
-          <p:style>
-            <a:lnRef idx="2">
-              <a:schemeClr val="accent1">
-                <a:lumMod val="75000"/>
-              </a:schemeClr>
-            </a:lnRef>
-            <a:fillRef idx="1">
-              <a:schemeClr val="accent1"/>
-            </a:fillRef>
-            <a:effectRef idx="0">
-              <a:srgbClr val="FFFFFF"/>
-            </a:effectRef>
-            <a:fontRef idx="minor">
-              <a:schemeClr val="lt1"/>
-            </a:fontRef>
-          </p:style>
-          <p:txBody>
-            <a:bodyPr rtlCol="0" anchor="ctr"/>
-            <a:p>
-              <a:pPr algn="ctr"/>
-              <a:endParaRPr lang="en-US"/>
-            </a:p>
-          </p:txBody>
-        </p:sp>
-        <p:sp>
-          <p:nvSpPr>
-            <p:cNvPr id="29" name="Text Box 28"/>
-            <p:cNvSpPr txBox="1"/>
-            <p:nvPr/>
-          </p:nvSpPr>
-          <p:spPr>
-            <a:xfrm>
-              <a:off x="11109" y="1310"/>
-              <a:ext cx="1819" cy="2080"/>
-            </a:xfrm>
-            <a:prstGeom prst="rect">
-              <a:avLst/>
-            </a:prstGeom>
-            <a:noFill/>
-          </p:spPr>
-          <p:txBody>
-            <a:bodyPr wrap="square" rtlCol="0">
-              <a:noAutofit/>
-            </a:bodyPr>
-            <a:p>
-              <a:pPr algn="ctr"/>
-              <a:r>
-                <a:rPr lang="en-US" sz="6600">
-                  <a:solidFill>
-                    <a:schemeClr val="bg1"/>
-                  </a:solidFill>
-                  <a:latin typeface="Comic Sans MS" panose="030F0702030302020204" charset="0"/>
-                  <a:cs typeface="Comic Sans MS" panose="030F0702030302020204" charset="0"/>
-                </a:rPr>
-                <a:t>C</a:t>
-              </a:r>
-              <a:endParaRPr lang="en-US" sz="6600">
-                <a:solidFill>
-                  <a:schemeClr val="bg1"/>
-                </a:solidFill>
-                <a:latin typeface="Comic Sans MS" panose="030F0702030302020204" charset="0"/>
-                <a:cs typeface="Comic Sans MS" panose="030F0702030302020204" charset="0"/>
-              </a:endParaRPr>
-            </a:p>
-          </p:txBody>
-        </p:sp>
-        <p:grpSp>
-          <p:nvGrpSpPr>
-            <p:cNvPr id="46" name="Group 45"/>
-            <p:cNvGrpSpPr/>
-            <p:nvPr/>
-          </p:nvGrpSpPr>
-          <p:grpSpPr>
-            <a:xfrm>
-              <a:off x="10376" y="3390"/>
-              <a:ext cx="3258" cy="3100"/>
-              <a:chOff x="752" y="3390"/>
-              <a:chExt cx="3258" cy="3100"/>
-            </a:xfrm>
-          </p:grpSpPr>
-          <p:sp>
-            <p:nvSpPr>
-              <p:cNvPr id="47" name="Text Box 46"/>
-              <p:cNvSpPr txBox="1"/>
-              <p:nvPr/>
-            </p:nvSpPr>
-            <p:spPr>
-              <a:xfrm>
-                <a:off x="752" y="3390"/>
-                <a:ext cx="3258" cy="2080"/>
-              </a:xfrm>
-              <a:prstGeom prst="rect">
-                <a:avLst/>
-              </a:prstGeom>
-              <a:noFill/>
-            </p:spPr>
-            <p:txBody>
-              <a:bodyPr wrap="square" rtlCol="0">
-                <a:noAutofit/>
-              </a:bodyPr>
-              <a:p>
-                <a:pPr algn="ctr"/>
-                <a:r>
-                  <a:rPr lang="en-US" sz="2000">
-                    <a:solidFill>
-                      <a:schemeClr val="bg1"/>
-                    </a:solidFill>
-                    <a:latin typeface="Comic Sans MS" panose="030F0702030302020204" charset="0"/>
-                    <a:cs typeface="Comic Sans MS" panose="030F0702030302020204" charset="0"/>
-                  </a:rPr>
-                  <a:t>Perkenalan</a:t>
-                </a:r>
-                <a:endParaRPr lang="en-US" sz="2000">
-                  <a:solidFill>
-                    <a:schemeClr val="bg1"/>
-                  </a:solidFill>
-                  <a:latin typeface="Comic Sans MS" panose="030F0702030302020204" charset="0"/>
-                  <a:cs typeface="Comic Sans MS" panose="030F0702030302020204" charset="0"/>
-                </a:endParaRPr>
-              </a:p>
-            </p:txBody>
-          </p:sp>
-          <p:sp>
-            <p:nvSpPr>
-              <p:cNvPr id="48" name="Text Box 47"/>
-              <p:cNvSpPr txBox="1"/>
-              <p:nvPr/>
-            </p:nvSpPr>
-            <p:spPr>
-              <a:xfrm>
-                <a:off x="752" y="4410"/>
-                <a:ext cx="3258" cy="2080"/>
-              </a:xfrm>
-              <a:prstGeom prst="rect">
-                <a:avLst/>
-              </a:prstGeom>
-              <a:noFill/>
-            </p:spPr>
-            <p:txBody>
-              <a:bodyPr wrap="square" rtlCol="0">
-                <a:noAutofit/>
-              </a:bodyPr>
-              <a:p>
-                <a:pPr algn="ctr"/>
-                <a:r>
-                  <a:rPr lang="en-US" altLang="en-US" sz="900">
-                    <a:solidFill>
-                      <a:schemeClr val="bg1"/>
-                    </a:solidFill>
-                    <a:latin typeface="Comic Sans MS" panose="030F0702030302020204" charset="0"/>
-                    <a:cs typeface="Comic Sans MS" panose="030F0702030302020204" charset="0"/>
-                  </a:rPr>
-                  <a:t>Lorem ipsum dolor sit amet, tempor fugiat velit exercitation qui. Velit non adipiscing fugiat reprehenderit cupidatat duis sed officia excepteur quis ut ullamco. Cillum irure proident aliqua sint anim fugiat in in adipiscing minim in aute.</a:t>
-                </a:r>
-                <a:endParaRPr lang="en-US" altLang="en-US" sz="900">
-                  <a:solidFill>
-                    <a:schemeClr val="bg1"/>
-                  </a:solidFill>
-                  <a:latin typeface="Comic Sans MS" panose="030F0702030302020204" charset="0"/>
-                  <a:cs typeface="Comic Sans MS" panose="030F0702030302020204" charset="0"/>
-                </a:endParaRPr>
-              </a:p>
-              <a:p>
-                <a:pPr algn="ctr"/>
-                <a:endParaRPr lang="en-US" altLang="en-US" sz="900">
-                  <a:solidFill>
-                    <a:schemeClr val="bg1"/>
-                  </a:solidFill>
-                  <a:latin typeface="Comic Sans MS" panose="030F0702030302020204" charset="0"/>
-                  <a:cs typeface="Comic Sans MS" panose="030F0702030302020204" charset="0"/>
-                </a:endParaRPr>
-              </a:p>
-              <a:p>
-                <a:pPr algn="ctr"/>
-                <a:r>
-                  <a:rPr lang="en-US" altLang="en-US" sz="900">
-                    <a:solidFill>
-                      <a:schemeClr val="bg1"/>
-                    </a:solidFill>
-                    <a:latin typeface="Comic Sans MS" panose="030F0702030302020204" charset="0"/>
-                    <a:cs typeface="Comic Sans MS" panose="030F0702030302020204" charset="0"/>
-                  </a:rPr>
-                  <a:t>Tempor ut in voluptate in nulla proident consectetur est do. Magna dolor aliquip consequat nisi ad occaecat laborum qui. Sed in qui elit aliquip sunt elit incididunt proident reprehenderit nostrud deserunt nulla. Consequat esse labore cupidatat enim anim irure do laborum quis. Fugiat nulla exercitation in velit labore et sunt velit do. Aliquip nostrud ullamco id qui commodo laboris labore eiusmod elit nulla ex ut.</a:t>
-                </a:r>
-                <a:endParaRPr lang="en-US" altLang="en-US" sz="900">
-                  <a:solidFill>
-                    <a:schemeClr val="bg1"/>
-                  </a:solidFill>
-                  <a:latin typeface="Comic Sans MS" panose="030F0702030302020204" charset="0"/>
-                  <a:cs typeface="Comic Sans MS" panose="030F0702030302020204" charset="0"/>
-                </a:endParaRPr>
-              </a:p>
-              <a:p>
-                <a:pPr algn="ctr"/>
-                <a:endParaRPr lang="en-US" altLang="en-US" sz="900">
-                  <a:solidFill>
-                    <a:schemeClr val="bg1"/>
-                  </a:solidFill>
-                  <a:latin typeface="Comic Sans MS" panose="030F0702030302020204" charset="0"/>
-                  <a:cs typeface="Comic Sans MS" panose="030F0702030302020204" charset="0"/>
-                </a:endParaRPr>
-              </a:p>
-            </p:txBody>
-          </p:sp>
-        </p:grpSp>
-      </p:grpSp>
-      <p:grpSp>
-        <p:nvGrpSpPr>
-          <p:cNvPr id="50" name="B"/>
-          <p:cNvGrpSpPr/>
-          <p:nvPr/>
-        </p:nvGrpSpPr>
-        <p:grpSpPr>
-          <a:xfrm>
-            <a:off x="3041650" y="0"/>
-            <a:ext cx="3746500" cy="6921500"/>
-            <a:chOff x="4790" y="0"/>
-            <a:chExt cx="5900" cy="10900"/>
-          </a:xfrm>
-        </p:grpSpPr>
-        <p:sp>
-          <p:nvSpPr>
-            <p:cNvPr id="20" name="Rectangle 19"/>
-            <p:cNvSpPr/>
-            <p:nvPr/>
-          </p:nvSpPr>
-          <p:spPr>
-            <a:xfrm>
-              <a:off x="4790" y="0"/>
-              <a:ext cx="4820" cy="10900"/>
-            </a:xfrm>
-            <a:prstGeom prst="rect">
-              <a:avLst/>
-            </a:prstGeom>
-            <a:solidFill>
-              <a:schemeClr val="accent3">
-                <a:lumMod val="75000"/>
-              </a:schemeClr>
-            </a:solidFill>
-            <a:ln>
-              <a:noFill/>
-            </a:ln>
-          </p:spPr>
-          <p:style>
-            <a:lnRef idx="2">
-              <a:schemeClr val="accent1">
-                <a:lumMod val="75000"/>
-              </a:schemeClr>
-            </a:lnRef>
-            <a:fillRef idx="1">
-              <a:schemeClr val="accent1"/>
-            </a:fillRef>
-            <a:effectRef idx="0">
-              <a:srgbClr val="FFFFFF"/>
-            </a:effectRef>
-            <a:fontRef idx="minor">
-              <a:schemeClr val="lt1"/>
-            </a:fontRef>
-          </p:style>
-          <p:txBody>
-            <a:bodyPr rtlCol="0" anchor="ctr"/>
-            <a:p>
-              <a:pPr algn="ctr"/>
-              <a:endParaRPr lang="en-US"/>
-            </a:p>
-          </p:txBody>
-        </p:sp>
-        <p:sp>
-          <p:nvSpPr>
-            <p:cNvPr id="24" name="Isosceles Triangle 23"/>
-            <p:cNvSpPr/>
-            <p:nvPr/>
-          </p:nvSpPr>
-          <p:spPr>
-            <a:xfrm rot="5400000">
-              <a:off x="8790" y="1890"/>
-              <a:ext cx="2720" cy="1080"/>
-            </a:xfrm>
-            <a:prstGeom prst="triangle">
-              <a:avLst/>
-            </a:prstGeom>
-            <a:solidFill>
-              <a:srgbClr val="B68C02"/>
-            </a:solidFill>
-            <a:ln>
-              <a:noFill/>
-            </a:ln>
-          </p:spPr>
-          <p:style>
-            <a:lnRef idx="2">
-              <a:schemeClr val="accent1">
-                <a:lumMod val="75000"/>
-              </a:schemeClr>
-            </a:lnRef>
-            <a:fillRef idx="1">
-              <a:schemeClr val="accent1"/>
-            </a:fillRef>
-            <a:effectRef idx="0">
-              <a:srgbClr val="FFFFFF"/>
-            </a:effectRef>
-            <a:fontRef idx="minor">
-              <a:schemeClr val="lt1"/>
-            </a:fontRef>
-          </p:style>
-          <p:txBody>
-            <a:bodyPr rtlCol="0" anchor="ctr"/>
-            <a:p>
-              <a:pPr algn="ctr"/>
-              <a:endParaRPr lang="en-US"/>
-            </a:p>
-          </p:txBody>
-        </p:sp>
-        <p:sp>
-          <p:nvSpPr>
-            <p:cNvPr id="28" name="Text Box 27"/>
-            <p:cNvSpPr txBox="1"/>
-            <p:nvPr/>
-          </p:nvSpPr>
-          <p:spPr>
-            <a:xfrm>
-              <a:off x="6290" y="1310"/>
-              <a:ext cx="1819" cy="2080"/>
-            </a:xfrm>
-            <a:prstGeom prst="rect">
-              <a:avLst/>
-            </a:prstGeom>
-            <a:noFill/>
-          </p:spPr>
-          <p:txBody>
-            <a:bodyPr wrap="square" rtlCol="0">
-              <a:noAutofit/>
-            </a:bodyPr>
-            <a:p>
-              <a:pPr algn="ctr"/>
-              <a:r>
-                <a:rPr lang="en-US" sz="6600">
-                  <a:solidFill>
-                    <a:schemeClr val="bg1"/>
-                  </a:solidFill>
-                  <a:latin typeface="Comic Sans MS" panose="030F0702030302020204" charset="0"/>
-                  <a:cs typeface="Comic Sans MS" panose="030F0702030302020204" charset="0"/>
-                </a:rPr>
-                <a:t>B</a:t>
-              </a:r>
-              <a:endParaRPr lang="en-US" sz="6600">
-                <a:solidFill>
-                  <a:schemeClr val="bg1"/>
-                </a:solidFill>
-                <a:latin typeface="Comic Sans MS" panose="030F0702030302020204" charset="0"/>
-                <a:cs typeface="Comic Sans MS" panose="030F0702030302020204" charset="0"/>
-              </a:endParaRPr>
-            </a:p>
-          </p:txBody>
-        </p:sp>
-        <p:grpSp>
-          <p:nvGrpSpPr>
-            <p:cNvPr id="40" name="Group 39"/>
-            <p:cNvGrpSpPr/>
-            <p:nvPr/>
-          </p:nvGrpSpPr>
-          <p:grpSpPr>
-            <a:xfrm>
-              <a:off x="5571" y="3390"/>
-              <a:ext cx="3258" cy="3100"/>
-              <a:chOff x="752" y="3390"/>
-              <a:chExt cx="3258" cy="3100"/>
-            </a:xfrm>
-          </p:grpSpPr>
-          <p:sp>
-            <p:nvSpPr>
-              <p:cNvPr id="41" name="Text Box 40"/>
-              <p:cNvSpPr txBox="1"/>
-              <p:nvPr/>
-            </p:nvSpPr>
-            <p:spPr>
-              <a:xfrm>
-                <a:off x="752" y="3390"/>
-                <a:ext cx="3258" cy="2080"/>
-              </a:xfrm>
-              <a:prstGeom prst="rect">
-                <a:avLst/>
-              </a:prstGeom>
-              <a:noFill/>
-            </p:spPr>
-            <p:txBody>
-              <a:bodyPr wrap="square" rtlCol="0">
-                <a:noAutofit/>
-              </a:bodyPr>
-              <a:p>
-                <a:pPr algn="ctr"/>
-                <a:r>
-                  <a:rPr lang="en-US" sz="2000">
-                    <a:solidFill>
-                      <a:schemeClr val="bg1"/>
-                    </a:solidFill>
-                    <a:latin typeface="Comic Sans MS" panose="030F0702030302020204" charset="0"/>
-                    <a:cs typeface="Comic Sans MS" panose="030F0702030302020204" charset="0"/>
-                  </a:rPr>
-                  <a:t>Perkenalan</a:t>
-                </a:r>
-                <a:endParaRPr lang="en-US" sz="2000">
-                  <a:solidFill>
-                    <a:schemeClr val="bg1"/>
-                  </a:solidFill>
-                  <a:latin typeface="Comic Sans MS" panose="030F0702030302020204" charset="0"/>
-                  <a:cs typeface="Comic Sans MS" panose="030F0702030302020204" charset="0"/>
-                </a:endParaRPr>
-              </a:p>
-            </p:txBody>
-          </p:sp>
-          <p:sp>
-            <p:nvSpPr>
-              <p:cNvPr id="42" name="Text Box 41"/>
-              <p:cNvSpPr txBox="1"/>
-              <p:nvPr/>
-            </p:nvSpPr>
-            <p:spPr>
-              <a:xfrm>
-                <a:off x="752" y="4410"/>
-                <a:ext cx="3258" cy="2080"/>
-              </a:xfrm>
-              <a:prstGeom prst="rect">
-                <a:avLst/>
-              </a:prstGeom>
-              <a:noFill/>
-            </p:spPr>
-            <p:txBody>
-              <a:bodyPr wrap="square" rtlCol="0">
-                <a:noAutofit/>
-              </a:bodyPr>
-              <a:p>
-                <a:pPr algn="ctr"/>
-                <a:r>
-                  <a:rPr lang="en-US" altLang="en-US" sz="900">
-                    <a:solidFill>
-                      <a:schemeClr val="bg1"/>
-                    </a:solidFill>
-                    <a:latin typeface="Comic Sans MS" panose="030F0702030302020204" charset="0"/>
-                    <a:cs typeface="Comic Sans MS" panose="030F0702030302020204" charset="0"/>
-                  </a:rPr>
-                  <a:t>Lorem ipsum dolor sit amet, tempor fugiat velit exercitation qui. Velit non adipiscing fugiat reprehenderit cupidatat duis sed officia excepteur quis ut ullamco. Cillum irure proident aliqua sint anim fugiat in in adipiscing minim in aute.</a:t>
-                </a:r>
-                <a:endParaRPr lang="en-US" altLang="en-US" sz="900">
-                  <a:solidFill>
-                    <a:schemeClr val="bg1"/>
-                  </a:solidFill>
-                  <a:latin typeface="Comic Sans MS" panose="030F0702030302020204" charset="0"/>
-                  <a:cs typeface="Comic Sans MS" panose="030F0702030302020204" charset="0"/>
-                </a:endParaRPr>
-              </a:p>
-              <a:p>
-                <a:pPr algn="ctr"/>
-                <a:endParaRPr lang="en-US" altLang="en-US" sz="900">
-                  <a:solidFill>
-                    <a:schemeClr val="bg1"/>
-                  </a:solidFill>
-                  <a:latin typeface="Comic Sans MS" panose="030F0702030302020204" charset="0"/>
-                  <a:cs typeface="Comic Sans MS" panose="030F0702030302020204" charset="0"/>
-                </a:endParaRPr>
-              </a:p>
-              <a:p>
-                <a:pPr algn="ctr"/>
-                <a:r>
-                  <a:rPr lang="en-US" altLang="en-US" sz="900">
-                    <a:solidFill>
-                      <a:schemeClr val="bg1"/>
-                    </a:solidFill>
-                    <a:latin typeface="Comic Sans MS" panose="030F0702030302020204" charset="0"/>
-                    <a:cs typeface="Comic Sans MS" panose="030F0702030302020204" charset="0"/>
-                  </a:rPr>
-                  <a:t>Tempor ut in voluptate in nulla proident consectetur est do. Magna dolor aliquip consequat nisi ad occaecat laborum qui. Sed in qui elit aliquip sunt elit incididunt proident reprehenderit nostrud deserunt nulla. Consequat esse labore cupidatat enim anim irure do laborum quis. Fugiat nulla exercitation in velit labore et sunt velit do. Aliquip nostrud ullamco id qui commodo laboris labore eiusmod elit nulla ex ut.</a:t>
-                </a:r>
-                <a:endParaRPr lang="en-US" altLang="en-US" sz="900">
-                  <a:solidFill>
-                    <a:schemeClr val="bg1"/>
-                  </a:solidFill>
-                  <a:latin typeface="Comic Sans MS" panose="030F0702030302020204" charset="0"/>
-                  <a:cs typeface="Comic Sans MS" panose="030F0702030302020204" charset="0"/>
-                </a:endParaRPr>
-              </a:p>
-              <a:p>
-                <a:pPr algn="ctr"/>
-                <a:endParaRPr lang="en-US" altLang="en-US" sz="900">
-                  <a:solidFill>
-                    <a:schemeClr val="bg1"/>
-                  </a:solidFill>
-                  <a:latin typeface="Comic Sans MS" panose="030F0702030302020204" charset="0"/>
-                  <a:cs typeface="Comic Sans MS" panose="030F0702030302020204" charset="0"/>
-                </a:endParaRPr>
-              </a:p>
-            </p:txBody>
-          </p:sp>
-        </p:grpSp>
-      </p:grpSp>
-      <p:grpSp>
-        <p:nvGrpSpPr>
-          <p:cNvPr id="49" name="A"/>
-          <p:cNvGrpSpPr/>
-          <p:nvPr/>
-        </p:nvGrpSpPr>
-        <p:grpSpPr>
-          <a:xfrm>
-            <a:off x="-2623185" y="0"/>
-            <a:ext cx="3746500" cy="6921500"/>
-            <a:chOff x="-30" y="0"/>
-            <a:chExt cx="5900" cy="10900"/>
-          </a:xfrm>
-        </p:grpSpPr>
-        <p:sp>
-          <p:nvSpPr>
-            <p:cNvPr id="19" name="Rectangle 18"/>
-            <p:cNvSpPr/>
-            <p:nvPr/>
-          </p:nvSpPr>
-          <p:spPr>
-            <a:xfrm>
-              <a:off x="-30" y="0"/>
-              <a:ext cx="4820" cy="10900"/>
-            </a:xfrm>
-            <a:prstGeom prst="rect">
-              <a:avLst/>
-            </a:prstGeom>
-            <a:solidFill>
-              <a:srgbClr val="FF0000"/>
-            </a:solidFill>
-            <a:ln>
-              <a:noFill/>
-            </a:ln>
-          </p:spPr>
-          <p:style>
-            <a:lnRef idx="2">
-              <a:schemeClr val="accent1">
-                <a:lumMod val="75000"/>
-              </a:schemeClr>
-            </a:lnRef>
-            <a:fillRef idx="1">
-              <a:schemeClr val="accent1"/>
-            </a:fillRef>
-            <a:effectRef idx="0">
-              <a:srgbClr val="FFFFFF"/>
-            </a:effectRef>
-            <a:fontRef idx="minor">
-              <a:schemeClr val="lt1"/>
-            </a:fontRef>
-          </p:style>
-          <p:txBody>
-            <a:bodyPr rtlCol="0" anchor="ctr"/>
-            <a:p>
-              <a:pPr algn="ctr"/>
-              <a:endParaRPr lang="en-US"/>
-            </a:p>
-          </p:txBody>
-        </p:sp>
-        <p:sp>
-          <p:nvSpPr>
-            <p:cNvPr id="23" name="Isosceles Triangle 22"/>
-            <p:cNvSpPr/>
-            <p:nvPr/>
-          </p:nvSpPr>
-          <p:spPr>
-            <a:xfrm rot="5400000">
-              <a:off x="3970" y="2130"/>
-              <a:ext cx="2720" cy="1080"/>
-            </a:xfrm>
-            <a:prstGeom prst="triangle">
-              <a:avLst/>
-            </a:prstGeom>
-            <a:solidFill>
-              <a:srgbClr val="FF0000"/>
-            </a:solidFill>
-            <a:ln>
-              <a:noFill/>
-            </a:ln>
-          </p:spPr>
-          <p:style>
-            <a:lnRef idx="2">
-              <a:schemeClr val="accent1">
-                <a:lumMod val="75000"/>
-              </a:schemeClr>
-            </a:lnRef>
-            <a:fillRef idx="1">
-              <a:schemeClr val="accent1"/>
-            </a:fillRef>
-            <a:effectRef idx="0">
-              <a:srgbClr val="FFFFFF"/>
-            </a:effectRef>
-            <a:fontRef idx="minor">
-              <a:schemeClr val="lt1"/>
-            </a:fontRef>
-          </p:style>
-          <p:txBody>
-            <a:bodyPr rtlCol="0" anchor="ctr"/>
-            <a:p>
-              <a:pPr algn="ctr"/>
-              <a:endParaRPr lang="en-US"/>
-            </a:p>
-          </p:txBody>
-        </p:sp>
-        <p:sp>
-          <p:nvSpPr>
-            <p:cNvPr id="27" name="Text Box 26"/>
-            <p:cNvSpPr txBox="1"/>
-            <p:nvPr/>
-          </p:nvSpPr>
-          <p:spPr>
-            <a:xfrm>
-              <a:off x="1471" y="1310"/>
-              <a:ext cx="1819" cy="2080"/>
-            </a:xfrm>
-            <a:prstGeom prst="rect">
-              <a:avLst/>
-            </a:prstGeom>
-            <a:noFill/>
-          </p:spPr>
-          <p:txBody>
-            <a:bodyPr wrap="square" rtlCol="0">
-              <a:noAutofit/>
-            </a:bodyPr>
-            <a:p>
-              <a:pPr algn="ctr"/>
-              <a:r>
-                <a:rPr lang="en-US" sz="6600">
-                  <a:solidFill>
-                    <a:schemeClr val="bg1"/>
-                  </a:solidFill>
-                  <a:latin typeface="Comic Sans MS" panose="030F0702030302020204" charset="0"/>
-                  <a:cs typeface="Comic Sans MS" panose="030F0702030302020204" charset="0"/>
-                </a:rPr>
-                <a:t>A</a:t>
-              </a:r>
-              <a:endParaRPr lang="en-US" sz="6600">
-                <a:solidFill>
-                  <a:schemeClr val="bg1"/>
-                </a:solidFill>
-                <a:latin typeface="Comic Sans MS" panose="030F0702030302020204" charset="0"/>
-                <a:cs typeface="Comic Sans MS" panose="030F0702030302020204" charset="0"/>
-              </a:endParaRPr>
-            </a:p>
-          </p:txBody>
-        </p:sp>
-        <p:grpSp>
-          <p:nvGrpSpPr>
-            <p:cNvPr id="39" name="Group 38"/>
-            <p:cNvGrpSpPr/>
-            <p:nvPr/>
-          </p:nvGrpSpPr>
-          <p:grpSpPr>
-            <a:xfrm>
-              <a:off x="752" y="3390"/>
-              <a:ext cx="3258" cy="3100"/>
-              <a:chOff x="752" y="3390"/>
-              <a:chExt cx="3258" cy="3100"/>
-            </a:xfrm>
-          </p:grpSpPr>
-          <p:sp>
-            <p:nvSpPr>
-              <p:cNvPr id="31" name="Text Box 30"/>
-              <p:cNvSpPr txBox="1"/>
-              <p:nvPr/>
-            </p:nvSpPr>
-            <p:spPr>
-              <a:xfrm>
-                <a:off x="752" y="3390"/>
-                <a:ext cx="3258" cy="2080"/>
-              </a:xfrm>
-              <a:prstGeom prst="rect">
-                <a:avLst/>
-              </a:prstGeom>
-              <a:noFill/>
-            </p:spPr>
-            <p:txBody>
-              <a:bodyPr wrap="square" rtlCol="0">
-                <a:noAutofit/>
-              </a:bodyPr>
-              <a:p>
-                <a:pPr algn="ctr"/>
-                <a:r>
-                  <a:rPr lang="en-US" sz="2000">
-                    <a:solidFill>
-                      <a:schemeClr val="bg1"/>
-                    </a:solidFill>
-                    <a:latin typeface="Comic Sans MS" panose="030F0702030302020204" charset="0"/>
-                    <a:cs typeface="Comic Sans MS" panose="030F0702030302020204" charset="0"/>
-                  </a:rPr>
-                  <a:t>Perkenalan</a:t>
-                </a:r>
-                <a:endParaRPr lang="en-US" sz="2000">
-                  <a:solidFill>
-                    <a:schemeClr val="bg1"/>
-                  </a:solidFill>
-                  <a:latin typeface="Comic Sans MS" panose="030F0702030302020204" charset="0"/>
-                  <a:cs typeface="Comic Sans MS" panose="030F0702030302020204" charset="0"/>
-                </a:endParaRPr>
-              </a:p>
-            </p:txBody>
-          </p:sp>
-          <p:sp>
-            <p:nvSpPr>
-              <p:cNvPr id="32" name="Text Box 31"/>
-              <p:cNvSpPr txBox="1"/>
-              <p:nvPr/>
-            </p:nvSpPr>
-            <p:spPr>
-              <a:xfrm>
-                <a:off x="752" y="4410"/>
-                <a:ext cx="3258" cy="2080"/>
-              </a:xfrm>
-              <a:prstGeom prst="rect">
-                <a:avLst/>
-              </a:prstGeom>
-              <a:noFill/>
-            </p:spPr>
-            <p:txBody>
-              <a:bodyPr wrap="square" rtlCol="0">
-                <a:noAutofit/>
-              </a:bodyPr>
-              <a:p>
-                <a:pPr algn="ctr"/>
-                <a:r>
-                  <a:rPr lang="en-US" altLang="en-US" sz="900">
-                    <a:solidFill>
-                      <a:schemeClr val="bg1"/>
-                    </a:solidFill>
-                    <a:latin typeface="Comic Sans MS" panose="030F0702030302020204" charset="0"/>
-                    <a:cs typeface="Comic Sans MS" panose="030F0702030302020204" charset="0"/>
-                  </a:rPr>
-                  <a:t>Lorem ipsum dolor sit amet, tempor fugiat velit exercitation qui. Velit non adipiscing fugiat reprehenderit cupidatat duis sed officia excepteur quis ut ullamco. Cillum irure proident aliqua sint anim fugiat in in adipiscing minim in aute.</a:t>
-                </a:r>
-                <a:endParaRPr lang="en-US" altLang="en-US" sz="900">
-                  <a:solidFill>
-                    <a:schemeClr val="bg1"/>
-                  </a:solidFill>
-                  <a:latin typeface="Comic Sans MS" panose="030F0702030302020204" charset="0"/>
-                  <a:cs typeface="Comic Sans MS" panose="030F0702030302020204" charset="0"/>
-                </a:endParaRPr>
-              </a:p>
-              <a:p>
-                <a:pPr algn="ctr"/>
-                <a:endParaRPr lang="en-US" altLang="en-US" sz="900">
-                  <a:solidFill>
-                    <a:schemeClr val="bg1"/>
-                  </a:solidFill>
-                  <a:latin typeface="Comic Sans MS" panose="030F0702030302020204" charset="0"/>
-                  <a:cs typeface="Comic Sans MS" panose="030F0702030302020204" charset="0"/>
-                </a:endParaRPr>
-              </a:p>
-              <a:p>
-                <a:pPr algn="ctr"/>
-                <a:r>
-                  <a:rPr lang="en-US" altLang="en-US" sz="900">
-                    <a:solidFill>
-                      <a:schemeClr val="bg1"/>
-                    </a:solidFill>
-                    <a:latin typeface="Comic Sans MS" panose="030F0702030302020204" charset="0"/>
-                    <a:cs typeface="Comic Sans MS" panose="030F0702030302020204" charset="0"/>
-                  </a:rPr>
-                  <a:t>Tempor ut in voluptate in nulla proident consectetur est do. Magna dolor aliquip consequat nisi ad occaecat laborum qui. Sed in qui elit aliquip sunt elit incididunt proident reprehenderit nostrud deserunt nulla. Consequat esse labore cupidatat enim anim irure do laborum quis. Fugiat nulla exercitation in velit labore et sunt velit do. Aliquip nostrud ullamco id qui commodo laboris labore eiusmod elit nulla ex ut.</a:t>
-                </a:r>
-                <a:endParaRPr lang="en-US" altLang="en-US" sz="900">
-                  <a:solidFill>
-                    <a:schemeClr val="bg1"/>
-                  </a:solidFill>
-                  <a:latin typeface="Comic Sans MS" panose="030F0702030302020204" charset="0"/>
-                  <a:cs typeface="Comic Sans MS" panose="030F0702030302020204" charset="0"/>
-                </a:endParaRPr>
-              </a:p>
-              <a:p>
-                <a:pPr algn="ctr"/>
-                <a:endParaRPr lang="en-US" altLang="en-US" sz="900">
-                  <a:solidFill>
-                    <a:schemeClr val="bg1"/>
-                  </a:solidFill>
-                  <a:latin typeface="Comic Sans MS" panose="030F0702030302020204" charset="0"/>
-                  <a:cs typeface="Comic Sans MS" panose="030F0702030302020204" charset="0"/>
-                </a:endParaRPr>
-              </a:p>
-            </p:txBody>
-          </p:sp>
-        </p:grpSp>
-      </p:grpSp>
-    </p:spTree>
-    <p:custDataLst>
-      <p:tags r:id="rId1"/>
-    </p:custDataLst>
-  </p:cSld>
-  <p:clrMapOvr>
-    <a:masterClrMapping/>
-  </p:clrMapOvr>
-  <mc:AlternateContent xmlns:mc="http://schemas.openxmlformats.org/markup-compatibility/2006">
-    <mc:Choice xmlns:p14="http://schemas.microsoft.com/office/powerpoint/2010/main" Requires="p14">
-      <p:transition spd="slow" p14:dur="2000"/>
-    </mc:Choice>
-    <mc:Fallback>
-      <p:transition spd="slow"/>
+      <p:transition spd="slow">
+        <p:fade/>
+      </p:transition>
     </mc:Fallback>
   </mc:AlternateContent>
 </p:sld>
